--- a/實習生商業模式演練/AAMA_實習生商業模式演練_R1訂閱制.pptx
+++ b/實習生商業模式演練/AAMA_實習生商業模式演練_R1訂閱制.pptx
@@ -14,9 +14,10 @@
     <p:sldId id="262" r:id="rId8"/>
     <p:sldId id="263" r:id="rId9"/>
     <p:sldId id="264" r:id="rId10"/>
+    <p:sldId id="265" r:id="rId11"/>
   </p:sldIdLst>
   <p:notesMasterIdLst>
-    <p:notesMasterId r:id="rId11"/>
+    <p:notesMasterId r:id="rId12"/>
   </p:notesMasterIdLst>
   <p:sldSz cx="12192000" cy="6858000"/>
   <p:notesSz cx="6858000" cy="12192000"/>
@@ -552,6 +553,94 @@
 </p:notes>
 </file>
 
+<file path=ppt/notesSlides/notesSlide10.xml><?xml version="1.0" encoding="utf-8"?>
+<p:notes xmlns:a="http://schemas.openxmlformats.org/drawingml/2006/main" xmlns:r="http://schemas.openxmlformats.org/officeDocument/2006/relationships" xmlns:p="http://schemas.openxmlformats.org/presentationml/2006/main">
+  <p:cSld>
+    <p:spTree>
+      <p:nvGrpSpPr>
+        <p:cNvPr id="1" name=""/>
+        <p:cNvGrpSpPr/>
+        <p:nvPr/>
+      </p:nvGrpSpPr>
+      <p:grpSpPr>
+        <a:xfrm>
+          <a:off x="0" y="0"/>
+          <a:ext cx="0" cy="0"/>
+          <a:chOff x="0" y="0"/>
+          <a:chExt cx="0" cy="0"/>
+        </a:xfrm>
+      </p:grpSpPr>
+      <p:sp>
+        <p:nvSpPr>
+          <p:cNvPr id="2" name="Slide Image Placeholder 1"/>
+          <p:cNvSpPr>
+            <a:spLocks noGrp="1" noRot="1" noChangeAspect="1"/>
+          </p:cNvSpPr>
+          <p:nvPr>
+            <p:ph type="sldImg"/>
+          </p:nvPr>
+        </p:nvSpPr>
+        <p:spPr/>
+      </p:sp>
+      <p:sp>
+        <p:nvSpPr>
+          <p:cNvPr id="3" name="Notes Placeholder 2"/>
+          <p:cNvSpPr>
+            <a:spLocks noGrp="1"/>
+          </p:cNvSpPr>
+          <p:nvPr>
+            <p:ph type="body" idx="1"/>
+          </p:nvPr>
+        </p:nvSpPr>
+        <p:spPr/>
+        <p:txBody>
+          <a:bodyPr/>
+          <a:lstStyle/>
+          <a:p>
+            <a:r>
+              <a:rPr lang="en-US" dirty="0"/>
+              <a:t/>
+            </a:r>
+            <a:endParaRPr lang="en-US" dirty="0"/>
+          </a:p>
+        </p:txBody>
+      </p:sp>
+      <p:sp>
+        <p:nvSpPr>
+          <p:cNvPr id="4" name="Slide Number Placeholder 3"/>
+          <p:cNvSpPr>
+            <a:spLocks noGrp="1"/>
+          </p:cNvSpPr>
+          <p:nvPr>
+            <p:ph type="sldNum" sz="quarter" idx="10"/>
+          </p:nvPr>
+        </p:nvSpPr>
+        <p:spPr/>
+        <p:txBody>
+          <a:bodyPr/>
+          <a:lstStyle/>
+          <a:p>
+            <a:fld id="{F7021451-1387-4CA6-816F-3879F97B5CBC}" type="slidenum">
+              <a:rPr lang="en-US"/>
+              <a:t>10</a:t>
+            </a:fld>
+            <a:endParaRPr lang="en-US"/>
+          </a:p>
+        </p:txBody>
+      </p:sp>
+    </p:spTree>
+    <p:extLst>
+      <p:ext uri="{BB962C8B-B14F-4D97-AF65-F5344CB8AC3E}">
+        <p14:creationId xmlns:p14="http://schemas.microsoft.com/office/powerpoint/2010/main" val="1024086991"/>
+      </p:ext>
+    </p:extLst>
+  </p:cSld>
+  <p:clrMapOvr>
+    <a:masterClrMapping/>
+  </p:clrMapOvr>
+</p:notes>
+</file>
+
 <file path=ppt/notesSlides/notesSlide2.xml><?xml version="1.0" encoding="utf-8"?>
 <p:notes xmlns:a="http://schemas.openxmlformats.org/drawingml/2006/main" xmlns:r="http://schemas.openxmlformats.org/officeDocument/2006/relationships" xmlns:p="http://schemas.openxmlformats.org/presentationml/2006/main">
   <p:cSld>
@@ -598,7 +687,7 @@
           <a:p>
             <a:r>
               <a:rPr lang="en-US" dirty="0"/>
-              <a:t/>
+              <a:t>五種收費方式各一輪，每輪個案兼顧數位科技與生活服務。個案收費方式部分為推估，出題前會再確認。</a:t>
             </a:r>
             <a:endParaRPr lang="en-US" dirty="0"/>
           </a:p>
@@ -2304,9 +2393,2865 @@
 </p:sld>
 </file>
 
+<file path=ppt/slides/slide10.xml><?xml version="1.0" encoding="utf-8"?>
+<p:sld xmlns:a="http://schemas.openxmlformats.org/drawingml/2006/main" xmlns:r="http://schemas.openxmlformats.org/officeDocument/2006/relationships" xmlns:p="http://schemas.openxmlformats.org/presentationml/2006/main">
+  <p:cSld name="Slide 10">
+    <p:spTree>
+      <p:nvGrpSpPr>
+        <p:cNvPr id="1" name=""/>
+        <p:cNvGrpSpPr/>
+        <p:nvPr/>
+      </p:nvGrpSpPr>
+      <p:grpSpPr>
+        <a:xfrm>
+          <a:off x="0" y="0"/>
+          <a:ext cx="0" cy="0"/>
+          <a:chOff x="0" y="0"/>
+          <a:chExt cx="0" cy="0"/>
+        </a:xfrm>
+      </p:grpSpPr>
+      <p:sp>
+        <p:nvSpPr>
+          <p:cNvPr id="2" name="Shape 0"/>
+          <p:cNvSpPr/>
+          <p:nvPr/>
+        </p:nvSpPr>
+        <p:spPr>
+          <a:xfrm>
+            <a:off x="9692640" y="2377440"/>
+            <a:ext cx="2194560" cy="2194560"/>
+          </a:xfrm>
+          <a:prstGeom prst="ellipse">
+            <a:avLst/>
+          </a:prstGeom>
+          <a:ln w="19050">
+            <a:solidFill>
+              <a:srgbClr val="FFFFFF">
+                <a:alpha val="18000"/>
+              </a:srgbClr>
+            </a:solidFill>
+            <a:prstDash val="solid"/>
+          </a:ln>
+        </p:spPr>
+      </p:sp>
+      <p:sp>
+        <p:nvSpPr>
+          <p:cNvPr id="3" name="Shape 1"/>
+          <p:cNvSpPr/>
+          <p:nvPr/>
+        </p:nvSpPr>
+        <p:spPr>
+          <a:xfrm>
+            <a:off x="9189720" y="1874520"/>
+            <a:ext cx="3200400" cy="3200400"/>
+          </a:xfrm>
+          <a:prstGeom prst="ellipse">
+            <a:avLst/>
+          </a:prstGeom>
+          <a:ln w="19050">
+            <a:solidFill>
+              <a:srgbClr val="FFFFFF">
+                <a:alpha val="18000"/>
+              </a:srgbClr>
+            </a:solidFill>
+            <a:prstDash val="solid"/>
+          </a:ln>
+        </p:spPr>
+      </p:sp>
+      <p:sp>
+        <p:nvSpPr>
+          <p:cNvPr id="4" name="Shape 2"/>
+          <p:cNvSpPr/>
+          <p:nvPr/>
+        </p:nvSpPr>
+        <p:spPr>
+          <a:xfrm>
+            <a:off x="8686800" y="1371600"/>
+            <a:ext cx="4206240" cy="4206240"/>
+          </a:xfrm>
+          <a:prstGeom prst="ellipse">
+            <a:avLst/>
+          </a:prstGeom>
+          <a:ln w="19050">
+            <a:solidFill>
+              <a:srgbClr val="FFFFFF">
+                <a:alpha val="18000"/>
+              </a:srgbClr>
+            </a:solidFill>
+            <a:prstDash val="solid"/>
+          </a:ln>
+        </p:spPr>
+      </p:sp>
+      <p:sp>
+        <p:nvSpPr>
+          <p:cNvPr id="5" name="Shape 3"/>
+          <p:cNvSpPr/>
+          <p:nvPr/>
+        </p:nvSpPr>
+        <p:spPr>
+          <a:xfrm>
+            <a:off x="8183880" y="868680"/>
+            <a:ext cx="5212080" cy="5212080"/>
+          </a:xfrm>
+          <a:prstGeom prst="ellipse">
+            <a:avLst/>
+          </a:prstGeom>
+          <a:ln w="19050">
+            <a:solidFill>
+              <a:srgbClr val="FFFFFF">
+                <a:alpha val="18000"/>
+              </a:srgbClr>
+            </a:solidFill>
+            <a:prstDash val="solid"/>
+          </a:ln>
+        </p:spPr>
+      </p:sp>
+      <p:sp>
+        <p:nvSpPr>
+          <p:cNvPr id="6" name="Shape 4"/>
+          <p:cNvSpPr/>
+          <p:nvPr/>
+        </p:nvSpPr>
+        <p:spPr>
+          <a:xfrm>
+            <a:off x="7680960" y="365760"/>
+            <a:ext cx="6217920" cy="6217920"/>
+          </a:xfrm>
+          <a:prstGeom prst="ellipse">
+            <a:avLst/>
+          </a:prstGeom>
+          <a:ln w="19050">
+            <a:solidFill>
+              <a:srgbClr val="FFFFFF">
+                <a:alpha val="18000"/>
+              </a:srgbClr>
+            </a:solidFill>
+            <a:prstDash val="solid"/>
+          </a:ln>
+        </p:spPr>
+      </p:sp>
+      <p:sp>
+        <p:nvSpPr>
+          <p:cNvPr id="7" name="Text 5"/>
+          <p:cNvSpPr txBox="1"/>
+          <p:nvPr/>
+        </p:nvSpPr>
+        <p:spPr>
+          <a:xfrm>
+            <a:off x="548640" y="1371600"/>
+            <a:ext cx="7315200" cy="822960"/>
+          </a:xfrm>
+          <a:prstGeom prst="rect">
+            <a:avLst/>
+          </a:prstGeom>
+          <a:noFill/>
+          <a:ln/>
+        </p:spPr>
+        <p:txBody>
+          <a:bodyPr wrap="square" lIns="0" tIns="0" rIns="0" bIns="0" rtlCol="0" anchor="ctr"/>
+          <a:lstStyle/>
+          <a:p>
+            <a:pPr indent="0" marL="0">
+              <a:buNone/>
+            </a:pPr>
+            <a:r>
+              <a:rPr lang="en-US" sz="4000" b="1" dirty="0">
+                <a:solidFill>
+                  <a:srgbClr val="FFFFFF"/>
+                </a:solidFill>
+                <a:latin typeface="Noto Sans TC" pitchFamily="34" charset="0"/>
+                <a:ea typeface="Noto Sans TC" pitchFamily="34" charset="-122"/>
+                <a:cs typeface="Noto Sans TC" pitchFamily="34" charset="-120"/>
+              </a:rPr>
+              <a:t>接下來</a:t>
+            </a:r>
+            <a:endParaRPr lang="en-US" sz="4000" dirty="0"/>
+          </a:p>
+        </p:txBody>
+      </p:sp>
+      <p:sp>
+        <p:nvSpPr>
+          <p:cNvPr id="8" name="Shape 6"/>
+          <p:cNvSpPr/>
+          <p:nvPr/>
+        </p:nvSpPr>
+        <p:spPr>
+          <a:xfrm>
+            <a:off x="548640" y="2560320"/>
+            <a:ext cx="2194560" cy="685800"/>
+          </a:xfrm>
+          <a:custGeom>
+            <a:avLst/>
+            <a:gdLst/>
+            <a:ahLst/>
+            <a:cxnLst/>
+            <a:rect l="l" t="t" r="r" b="b"/>
+            <a:pathLst>
+              <a:path w="2194560" h="685800">
+                <a:moveTo>
+                  <a:pt x="0" y="0"/>
+                </a:moveTo>
+                <a:lnTo>
+                  <a:pt x="2194560" y="0"/>
+                </a:lnTo>
+                <a:lnTo>
+                  <a:pt x="1965960" y="685800"/>
+                </a:lnTo>
+                <a:lnTo>
+                  <a:pt x="0" y="685800"/>
+                </a:lnTo>
+                <a:close/>
+              </a:path>
+            </a:pathLst>
+          </a:custGeom>
+          <a:solidFill>
+            <a:srgbClr val="FFFFFF"/>
+          </a:solidFill>
+          <a:ln w="12700">
+            <a:solidFill>
+              <a:srgbClr val="FFFFFF">
+                <a:alpha val="0"/>
+              </a:srgbClr>
+            </a:solidFill>
+            <a:prstDash val="solid"/>
+          </a:ln>
+        </p:spPr>
+      </p:sp>
+      <p:sp>
+        <p:nvSpPr>
+          <p:cNvPr id="9" name="Text 7"/>
+          <p:cNvSpPr txBox="1"/>
+          <p:nvPr/>
+        </p:nvSpPr>
+        <p:spPr>
+          <a:xfrm>
+            <a:off x="731520" y="2560320"/>
+            <a:ext cx="1828800" cy="685800"/>
+          </a:xfrm>
+          <a:prstGeom prst="rect">
+            <a:avLst/>
+          </a:prstGeom>
+          <a:noFill/>
+          <a:ln/>
+        </p:spPr>
+        <p:txBody>
+          <a:bodyPr wrap="square" lIns="0" tIns="0" rIns="0" bIns="0" rtlCol="0" anchor="ctr"/>
+          <a:lstStyle/>
+          <a:p>
+            <a:pPr indent="0" marL="0">
+              <a:buNone/>
+            </a:pPr>
+            <a:r>
+              <a:rPr lang="en-US" sz="1800" b="1" dirty="0">
+                <a:solidFill>
+                  <a:srgbClr val="0E7EE2"/>
+                </a:solidFill>
+                <a:latin typeface="Noto Sans TC" pitchFamily="34" charset="0"/>
+                <a:ea typeface="Noto Sans TC" pitchFamily="34" charset="-122"/>
+                <a:cs typeface="Noto Sans TC" pitchFamily="34" charset="-120"/>
+              </a:rPr>
+              <a:t>3 天內</a:t>
+            </a:r>
+            <a:endParaRPr lang="en-US" sz="1800" dirty="0"/>
+          </a:p>
+        </p:txBody>
+      </p:sp>
+      <p:sp>
+        <p:nvSpPr>
+          <p:cNvPr id="10" name="Text 8"/>
+          <p:cNvSpPr txBox="1"/>
+          <p:nvPr/>
+        </p:nvSpPr>
+        <p:spPr>
+          <a:xfrm>
+            <a:off x="3017520" y="2560320"/>
+            <a:ext cx="7772400" cy="685800"/>
+          </a:xfrm>
+          <a:prstGeom prst="rect">
+            <a:avLst/>
+          </a:prstGeom>
+          <a:noFill/>
+          <a:ln/>
+        </p:spPr>
+        <p:txBody>
+          <a:bodyPr wrap="square" lIns="0" tIns="0" rIns="0" bIns="0" rtlCol="0" anchor="ctr"/>
+          <a:lstStyle/>
+          <a:p>
+            <a:pPr indent="0" marL="0">
+              <a:buNone/>
+            </a:pPr>
+            <a:r>
+              <a:rPr lang="en-US" sz="1900" dirty="0">
+                <a:solidFill>
+                  <a:srgbClr val="FFFFFF"/>
+                </a:solidFill>
+                <a:latin typeface="Noto Sans TC" pitchFamily="34" charset="0"/>
+                <a:ea typeface="Noto Sans TC" pitchFamily="34" charset="-122"/>
+                <a:cs typeface="Noto Sans TC" pitchFamily="34" charset="-120"/>
+              </a:rPr>
+              <a:t>專案經理彙整回饋，安排大家勾選的協助</a:t>
+            </a:r>
+            <a:endParaRPr lang="en-US" sz="1900" dirty="0"/>
+          </a:p>
+        </p:txBody>
+      </p:sp>
+      <p:sp>
+        <p:nvSpPr>
+          <p:cNvPr id="11" name="Shape 9"/>
+          <p:cNvSpPr/>
+          <p:nvPr/>
+        </p:nvSpPr>
+        <p:spPr>
+          <a:xfrm>
+            <a:off x="548640" y="3520440"/>
+            <a:ext cx="2194560" cy="685800"/>
+          </a:xfrm>
+          <a:custGeom>
+            <a:avLst/>
+            <a:gdLst/>
+            <a:ahLst/>
+            <a:cxnLst/>
+            <a:rect l="l" t="t" r="r" b="b"/>
+            <a:pathLst>
+              <a:path w="2194560" h="685800">
+                <a:moveTo>
+                  <a:pt x="0" y="0"/>
+                </a:moveTo>
+                <a:lnTo>
+                  <a:pt x="2194560" y="0"/>
+                </a:lnTo>
+                <a:lnTo>
+                  <a:pt x="1965960" y="685800"/>
+                </a:lnTo>
+                <a:lnTo>
+                  <a:pt x="0" y="685800"/>
+                </a:lnTo>
+                <a:close/>
+              </a:path>
+            </a:pathLst>
+          </a:custGeom>
+          <a:solidFill>
+            <a:srgbClr val="FFFFFF"/>
+          </a:solidFill>
+          <a:ln w="12700">
+            <a:solidFill>
+              <a:srgbClr val="FFFFFF">
+                <a:alpha val="0"/>
+              </a:srgbClr>
+            </a:solidFill>
+            <a:prstDash val="solid"/>
+          </a:ln>
+        </p:spPr>
+      </p:sp>
+      <p:sp>
+        <p:nvSpPr>
+          <p:cNvPr id="12" name="Text 10"/>
+          <p:cNvSpPr txBox="1"/>
+          <p:nvPr/>
+        </p:nvSpPr>
+        <p:spPr>
+          <a:xfrm>
+            <a:off x="731520" y="3520440"/>
+            <a:ext cx="1828800" cy="685800"/>
+          </a:xfrm>
+          <a:prstGeom prst="rect">
+            <a:avLst/>
+          </a:prstGeom>
+          <a:noFill/>
+          <a:ln/>
+        </p:spPr>
+        <p:txBody>
+          <a:bodyPr wrap="square" lIns="0" tIns="0" rIns="0" bIns="0" rtlCol="0" anchor="ctr"/>
+          <a:lstStyle/>
+          <a:p>
+            <a:pPr indent="0" marL="0">
+              <a:buNone/>
+            </a:pPr>
+            <a:r>
+              <a:rPr lang="en-US" sz="1800" b="1" dirty="0">
+                <a:solidFill>
+                  <a:srgbClr val="0E7EE2"/>
+                </a:solidFill>
+                <a:latin typeface="Noto Sans TC" pitchFamily="34" charset="0"/>
+                <a:ea typeface="Noto Sans TC" pitchFamily="34" charset="-122"/>
+                <a:cs typeface="Noto Sans TC" pitchFamily="34" charset="-120"/>
+              </a:rPr>
+              <a:t>W8</a:t>
+            </a:r>
+            <a:endParaRPr lang="en-US" sz="1800" dirty="0"/>
+          </a:p>
+        </p:txBody>
+      </p:sp>
+      <p:sp>
+        <p:nvSpPr>
+          <p:cNvPr id="13" name="Text 11"/>
+          <p:cNvSpPr txBox="1"/>
+          <p:nvPr/>
+        </p:nvSpPr>
+        <p:spPr>
+          <a:xfrm>
+            <a:off x="3017520" y="3520440"/>
+            <a:ext cx="7772400" cy="685800"/>
+          </a:xfrm>
+          <a:prstGeom prst="rect">
+            <a:avLst/>
+          </a:prstGeom>
+          <a:noFill/>
+          <a:ln/>
+        </p:spPr>
+        <p:txBody>
+          <a:bodyPr wrap="square" lIns="0" tIns="0" rIns="0" bIns="0" rtlCol="0" anchor="ctr"/>
+          <a:lstStyle/>
+          <a:p>
+            <a:pPr indent="0" marL="0">
+              <a:buNone/>
+            </a:pPr>
+            <a:r>
+              <a:rPr lang="en-US" sz="1900" dirty="0">
+                <a:solidFill>
+                  <a:srgbClr val="FFFFFF"/>
+                </a:solidFill>
+                <a:latin typeface="Noto Sans TC" pitchFamily="34" charset="0"/>
+                <a:ea typeface="Noto Sans TC" pitchFamily="34" charset="-122"/>
+                <a:cs typeface="Noto Sans TC" pitchFamily="34" charset="-120"/>
+              </a:rPr>
+              <a:t>依回饋修訂、成果歸檔，繳交一頁學習反思</a:t>
+            </a:r>
+            <a:endParaRPr lang="en-US" sz="1900" dirty="0"/>
+          </a:p>
+        </p:txBody>
+      </p:sp>
+      <p:sp>
+        <p:nvSpPr>
+          <p:cNvPr id="14" name="Shape 12"/>
+          <p:cNvSpPr/>
+          <p:nvPr/>
+        </p:nvSpPr>
+        <p:spPr>
+          <a:xfrm>
+            <a:off x="548640" y="4480560"/>
+            <a:ext cx="2194560" cy="685800"/>
+          </a:xfrm>
+          <a:custGeom>
+            <a:avLst/>
+            <a:gdLst/>
+            <a:ahLst/>
+            <a:cxnLst/>
+            <a:rect l="l" t="t" r="r" b="b"/>
+            <a:pathLst>
+              <a:path w="2194560" h="685800">
+                <a:moveTo>
+                  <a:pt x="0" y="0"/>
+                </a:moveTo>
+                <a:lnTo>
+                  <a:pt x="2194560" y="0"/>
+                </a:lnTo>
+                <a:lnTo>
+                  <a:pt x="1965960" y="685800"/>
+                </a:lnTo>
+                <a:lnTo>
+                  <a:pt x="0" y="685800"/>
+                </a:lnTo>
+                <a:close/>
+              </a:path>
+            </a:pathLst>
+          </a:custGeom>
+          <a:solidFill>
+            <a:srgbClr val="FF9E3E"/>
+          </a:solidFill>
+          <a:ln w="12700">
+            <a:solidFill>
+              <a:srgbClr val="FF9E3E">
+                <a:alpha val="0"/>
+              </a:srgbClr>
+            </a:solidFill>
+            <a:prstDash val="solid"/>
+          </a:ln>
+        </p:spPr>
+      </p:sp>
+      <p:sp>
+        <p:nvSpPr>
+          <p:cNvPr id="15" name="Text 13"/>
+          <p:cNvSpPr txBox="1"/>
+          <p:nvPr/>
+        </p:nvSpPr>
+        <p:spPr>
+          <a:xfrm>
+            <a:off x="731520" y="4480560"/>
+            <a:ext cx="1828800" cy="685800"/>
+          </a:xfrm>
+          <a:prstGeom prst="rect">
+            <a:avLst/>
+          </a:prstGeom>
+          <a:noFill/>
+          <a:ln/>
+        </p:spPr>
+        <p:txBody>
+          <a:bodyPr wrap="square" lIns="0" tIns="0" rIns="0" bIns="0" rtlCol="0" anchor="ctr"/>
+          <a:lstStyle/>
+          <a:p>
+            <a:pPr indent="0" marL="0">
+              <a:buNone/>
+            </a:pPr>
+            <a:r>
+              <a:rPr lang="en-US" sz="1800" b="1" dirty="0">
+                <a:solidFill>
+                  <a:srgbClr val="FFFFFF"/>
+                </a:solidFill>
+                <a:latin typeface="Noto Sans TC" pitchFamily="34" charset="0"/>
+                <a:ea typeface="Noto Sans TC" pitchFamily="34" charset="-122"/>
+                <a:cs typeface="Noto Sans TC" pitchFamily="34" charset="-120"/>
+              </a:rPr>
+              <a:t>11–12 月</a:t>
+            </a:r>
+            <a:endParaRPr lang="en-US" sz="1800" dirty="0"/>
+          </a:p>
+        </p:txBody>
+      </p:sp>
+      <p:sp>
+        <p:nvSpPr>
+          <p:cNvPr id="16" name="Text 14"/>
+          <p:cNvSpPr txBox="1"/>
+          <p:nvPr/>
+        </p:nvSpPr>
+        <p:spPr>
+          <a:xfrm>
+            <a:off x="3017520" y="4480560"/>
+            <a:ext cx="7772400" cy="685800"/>
+          </a:xfrm>
+          <a:prstGeom prst="rect">
+            <a:avLst/>
+          </a:prstGeom>
+          <a:noFill/>
+          <a:ln/>
+        </p:spPr>
+        <p:txBody>
+          <a:bodyPr wrap="square" lIns="0" tIns="0" rIns="0" bIns="0" rtlCol="0" anchor="ctr"/>
+          <a:lstStyle/>
+          <a:p>
+            <a:pPr indent="0" marL="0">
+              <a:buNone/>
+            </a:pPr>
+            <a:r>
+              <a:rPr lang="en-US" sz="1900" dirty="0">
+                <a:solidFill>
+                  <a:srgbClr val="FFFFFF"/>
+                </a:solidFill>
+                <a:latin typeface="Noto Sans TC" pitchFamily="34" charset="0"/>
+                <a:ea typeface="Noto Sans TC" pitchFamily="34" charset="-122"/>
+                <a:cs typeface="Noto Sans TC" pitchFamily="34" charset="-120"/>
+              </a:rPr>
+              <a:t>第 2 輪｜交易抽成／媒合（個人進行）</a:t>
+            </a:r>
+            <a:endParaRPr lang="en-US" sz="1900" dirty="0"/>
+          </a:p>
+        </p:txBody>
+      </p:sp>
+      <p:sp>
+        <p:nvSpPr>
+          <p:cNvPr id="17" name="Text 15"/>
+          <p:cNvSpPr txBox="1"/>
+          <p:nvPr/>
+        </p:nvSpPr>
+        <p:spPr>
+          <a:xfrm>
+            <a:off x="548640" y="5669280"/>
+            <a:ext cx="5486400" cy="548640"/>
+          </a:xfrm>
+          <a:prstGeom prst="rect">
+            <a:avLst/>
+          </a:prstGeom>
+          <a:noFill/>
+          <a:ln/>
+        </p:spPr>
+        <p:txBody>
+          <a:bodyPr wrap="square" lIns="0" tIns="0" rIns="0" bIns="0" rtlCol="0" anchor="ctr"/>
+          <a:lstStyle/>
+          <a:p>
+            <a:pPr indent="0" marL="0">
+              <a:buNone/>
+            </a:pPr>
+            <a:r>
+              <a:rPr lang="en-US" sz="2400" b="1" dirty="0">
+                <a:solidFill>
+                  <a:srgbClr val="FFFFFF"/>
+                </a:solidFill>
+                <a:latin typeface="Noto Sans TC" pitchFamily="34" charset="0"/>
+                <a:ea typeface="Noto Sans TC" pitchFamily="34" charset="-122"/>
+                <a:cs typeface="Noto Sans TC" pitchFamily="34" charset="-120"/>
+              </a:rPr>
+              <a:t>謝謝大家！</a:t>
+            </a:r>
+            <a:endParaRPr lang="en-US" sz="2400" dirty="0"/>
+          </a:p>
+        </p:txBody>
+      </p:sp>
+    </p:spTree>
+  </p:cSld>
+  <p:clrMapOvr>
+    <a:masterClrMapping/>
+  </p:clrMapOvr>
+</p:sld>
+</file>
+
 <file path=ppt/slides/slide2.xml><?xml version="1.0" encoding="utf-8"?>
 <p:sld xmlns:a="http://schemas.openxmlformats.org/drawingml/2006/main" xmlns:r="http://schemas.openxmlformats.org/officeDocument/2006/relationships" xmlns:p="http://schemas.openxmlformats.org/presentationml/2006/main">
   <p:cSld name="Slide 2">
+    <p:spTree>
+      <p:nvGrpSpPr>
+        <p:cNvPr id="1" name=""/>
+        <p:cNvGrpSpPr/>
+        <p:nvPr/>
+      </p:nvGrpSpPr>
+      <p:grpSpPr>
+        <a:xfrm>
+          <a:off x="0" y="0"/>
+          <a:ext cx="0" cy="0"/>
+          <a:chOff x="0" y="0"/>
+          <a:chExt cx="0" cy="0"/>
+        </a:xfrm>
+      </p:grpSpPr>
+      <p:sp>
+        <p:nvSpPr>
+          <p:cNvPr id="2" name="Text 1"/>
+          <p:cNvSpPr/>
+          <p:nvPr>
+            <p:ph idx="101" type="title" hasCustomPrompt="1"/>
+          </p:nvPr>
+        </p:nvSpPr>
+        <p:spPr>
+          <a:xfrm>
+            <a:off x="548640" y="411480"/>
+            <a:ext cx="9601200" cy="822960"/>
+          </a:xfrm>
+          <a:prstGeom prst="rect">
+            <a:avLst/>
+          </a:prstGeom>
+          <a:noFill/>
+          <a:ln/>
+        </p:spPr>
+        <p:txBody>
+          <a:bodyPr wrap="square" lIns="0" tIns="0" rIns="0" bIns="0" rtlCol="0" anchor="ctr"/>
+          <a:lstStyle/>
+          <a:p>
+            <a:pPr algn="l" indent="0" marL="0">
+              <a:buNone/>
+            </a:pPr>
+            <a:r>
+              <a:rPr lang="en-US" sz="3200" b="1" dirty="0">
+                <a:solidFill>
+                  <a:srgbClr val="0E7EE2"/>
+                </a:solidFill>
+                <a:latin typeface="Noto Sans TC" pitchFamily="34" charset="0"/>
+                <a:ea typeface="Noto Sans TC" pitchFamily="34" charset="-122"/>
+                <a:cs typeface="Noto Sans TC" pitchFamily="34" charset="-120"/>
+              </a:rPr>
+              <a:t>這一年的五輪演練｜一輪一種收費模式</a:t>
+            </a:r>
+            <a:endParaRPr lang="en-US" sz="3200" dirty="0"/>
+          </a:p>
+        </p:txBody>
+      </p:sp>
+      <p:sp>
+        <p:nvSpPr>
+          <p:cNvPr id="3" name="Text 1"/>
+          <p:cNvSpPr txBox="1"/>
+          <p:nvPr/>
+        </p:nvSpPr>
+        <p:spPr>
+          <a:xfrm>
+            <a:off x="548640" y="1234440"/>
+            <a:ext cx="10515600" cy="365760"/>
+          </a:xfrm>
+          <a:prstGeom prst="rect">
+            <a:avLst/>
+          </a:prstGeom>
+          <a:noFill/>
+          <a:ln/>
+        </p:spPr>
+        <p:txBody>
+          <a:bodyPr wrap="square" lIns="0" tIns="0" rIns="0" bIns="0" rtlCol="0" anchor="ctr"/>
+          <a:lstStyle/>
+          <a:p>
+            <a:pPr indent="0" marL="0">
+              <a:buNone/>
+            </a:pPr>
+            <a:r>
+              <a:rPr lang="en-US" sz="1500" dirty="0">
+                <a:solidFill>
+                  <a:srgbClr val="414141"/>
+                </a:solidFill>
+                <a:latin typeface="Noto Sans TC" pitchFamily="34" charset="0"/>
+                <a:ea typeface="Noto Sans TC" pitchFamily="34" charset="-122"/>
+                <a:cs typeface="Noto Sans TC" pitchFamily="34" charset="-120"/>
+              </a:rPr>
+              <a:t>每 2 個月一輪，第 1 輪團體分組，第 2 輪起個人進行。今天是第 1 輪。</a:t>
+            </a:r>
+            <a:endParaRPr lang="en-US" sz="1500" dirty="0"/>
+          </a:p>
+        </p:txBody>
+      </p:sp>
+      <p:sp>
+        <p:nvSpPr>
+          <p:cNvPr id="4" name="Shape 2"/>
+          <p:cNvSpPr/>
+          <p:nvPr/>
+        </p:nvSpPr>
+        <p:spPr>
+          <a:xfrm>
+            <a:off x="548640" y="1965960"/>
+            <a:ext cx="2154326" cy="548640"/>
+          </a:xfrm>
+          <a:custGeom>
+            <a:avLst/>
+            <a:gdLst/>
+            <a:ahLst/>
+            <a:cxnLst/>
+            <a:rect l="l" t="t" r="r" b="b"/>
+            <a:pathLst>
+              <a:path w="2154326" h="548640">
+                <a:moveTo>
+                  <a:pt x="0" y="0"/>
+                </a:moveTo>
+                <a:lnTo>
+                  <a:pt x="2154326" y="0"/>
+                </a:lnTo>
+                <a:lnTo>
+                  <a:pt x="1971446" y="548640"/>
+                </a:lnTo>
+                <a:lnTo>
+                  <a:pt x="0" y="548640"/>
+                </a:lnTo>
+                <a:close/>
+              </a:path>
+            </a:pathLst>
+          </a:custGeom>
+          <a:solidFill>
+            <a:srgbClr val="0E7EE2"/>
+          </a:solidFill>
+          <a:ln w="12700">
+            <a:solidFill>
+              <a:srgbClr val="0E7EE2">
+                <a:alpha val="0"/>
+              </a:srgbClr>
+            </a:solidFill>
+            <a:prstDash val="solid"/>
+          </a:ln>
+        </p:spPr>
+      </p:sp>
+      <p:sp>
+        <p:nvSpPr>
+          <p:cNvPr id="5" name="Text 3"/>
+          <p:cNvSpPr txBox="1"/>
+          <p:nvPr/>
+        </p:nvSpPr>
+        <p:spPr>
+          <a:xfrm>
+            <a:off x="685800" y="1965960"/>
+            <a:ext cx="1834286" cy="548640"/>
+          </a:xfrm>
+          <a:prstGeom prst="rect">
+            <a:avLst/>
+          </a:prstGeom>
+          <a:noFill/>
+          <a:ln/>
+        </p:spPr>
+        <p:txBody>
+          <a:bodyPr wrap="square" lIns="0" tIns="0" rIns="0" bIns="0" rtlCol="0" anchor="ctr"/>
+          <a:lstStyle/>
+          <a:p>
+            <a:pPr indent="0" marL="0">
+              <a:buNone/>
+            </a:pPr>
+            <a:r>
+              <a:rPr lang="en-US" sz="1300" b="1" dirty="0">
+                <a:solidFill>
+                  <a:srgbClr val="FFFFFF"/>
+                </a:solidFill>
+                <a:latin typeface="Poppins SemiBold" pitchFamily="34" charset="0"/>
+                <a:ea typeface="Poppins SemiBold" pitchFamily="34" charset="-122"/>
+                <a:cs typeface="Poppins SemiBold" pitchFamily="34" charset="-120"/>
+              </a:rPr>
+              <a:t>R1  </a:t>
+            </a:r>
+            <a:pPr indent="0" marL="0">
+              <a:buNone/>
+            </a:pPr>
+            <a:r>
+              <a:rPr lang="en-US" sz="1300" dirty="0">
+                <a:solidFill>
+                  <a:srgbClr val="FFFFFF"/>
+                </a:solidFill>
+                <a:latin typeface="Poppins SemiBold" pitchFamily="34" charset="0"/>
+                <a:ea typeface="Poppins SemiBold" pitchFamily="34" charset="-122"/>
+                <a:cs typeface="Poppins SemiBold" pitchFamily="34" charset="-120"/>
+              </a:rPr>
+              <a:t>2026.09–10</a:t>
+            </a:r>
+            <a:endParaRPr lang="en-US" sz="1300" dirty="0"/>
+          </a:p>
+        </p:txBody>
+      </p:sp>
+      <p:sp>
+        <p:nvSpPr>
+          <p:cNvPr id="6" name="Shape 4"/>
+          <p:cNvSpPr/>
+          <p:nvPr/>
+        </p:nvSpPr>
+        <p:spPr>
+          <a:xfrm>
+            <a:off x="548640" y="2697480"/>
+            <a:ext cx="2108606" cy="3246120"/>
+          </a:xfrm>
+          <a:prstGeom prst="rect">
+            <a:avLst/>
+          </a:prstGeom>
+          <a:solidFill>
+            <a:srgbClr val="E4F1FD"/>
+          </a:solidFill>
+          <a:ln w="25400">
+            <a:solidFill>
+              <a:srgbClr val="0E7EE2"/>
+            </a:solidFill>
+            <a:prstDash val="solid"/>
+          </a:ln>
+        </p:spPr>
+      </p:sp>
+      <p:sp>
+        <p:nvSpPr>
+          <p:cNvPr id="7" name="Text 5"/>
+          <p:cNvSpPr txBox="1"/>
+          <p:nvPr/>
+        </p:nvSpPr>
+        <p:spPr>
+          <a:xfrm>
+            <a:off x="731520" y="2880360"/>
+            <a:ext cx="1742846" cy="457200"/>
+          </a:xfrm>
+          <a:prstGeom prst="rect">
+            <a:avLst/>
+          </a:prstGeom>
+          <a:noFill/>
+          <a:ln/>
+        </p:spPr>
+        <p:txBody>
+          <a:bodyPr wrap="square" lIns="0" tIns="0" rIns="0" bIns="0" rtlCol="0" anchor="ctr"/>
+          <a:lstStyle/>
+          <a:p>
+            <a:pPr indent="0" marL="0">
+              <a:buNone/>
+            </a:pPr>
+            <a:r>
+              <a:rPr lang="en-US" sz="1800" b="1" dirty="0">
+                <a:solidFill>
+                  <a:srgbClr val="0E7EE2"/>
+                </a:solidFill>
+                <a:latin typeface="Noto Sans TC" pitchFamily="34" charset="0"/>
+                <a:ea typeface="Noto Sans TC" pitchFamily="34" charset="-122"/>
+                <a:cs typeface="Noto Sans TC" pitchFamily="34" charset="-120"/>
+              </a:rPr>
+              <a:t>訂閱制</a:t>
+            </a:r>
+            <a:endParaRPr lang="en-US" sz="1800" dirty="0"/>
+          </a:p>
+        </p:txBody>
+      </p:sp>
+      <p:sp>
+        <p:nvSpPr>
+          <p:cNvPr id="8" name="Text 6"/>
+          <p:cNvSpPr txBox="1"/>
+          <p:nvPr/>
+        </p:nvSpPr>
+        <p:spPr>
+          <a:xfrm>
+            <a:off x="731520" y="3383280"/>
+            <a:ext cx="1742846" cy="868680"/>
+          </a:xfrm>
+          <a:prstGeom prst="rect">
+            <a:avLst/>
+          </a:prstGeom>
+          <a:noFill/>
+          <a:ln/>
+        </p:spPr>
+        <p:txBody>
+          <a:bodyPr wrap="square" lIns="0" tIns="0" rIns="0" bIns="0" rtlCol="0" anchor="t"/>
+          <a:lstStyle/>
+          <a:p>
+            <a:pPr indent="0" marL="0">
+              <a:buNone/>
+            </a:pPr>
+            <a:r>
+              <a:rPr lang="en-US" sz="1300" dirty="0">
+                <a:solidFill>
+                  <a:srgbClr val="414141"/>
+                </a:solidFill>
+                <a:latin typeface="Noto Sans TC" pitchFamily="34" charset="0"/>
+                <a:ea typeface="Noto Sans TC" pitchFamily="34" charset="-122"/>
+                <a:cs typeface="Noto Sans TC" pitchFamily="34" charset="-120"/>
+              </a:rPr>
+              <a:t>定期付費、持續使用服務，例如月費、年費</a:t>
+            </a:r>
+            <a:endParaRPr lang="en-US" sz="1300" dirty="0"/>
+          </a:p>
+        </p:txBody>
+      </p:sp>
+      <p:sp>
+        <p:nvSpPr>
+          <p:cNvPr id="9" name="Text 7"/>
+          <p:cNvSpPr txBox="1"/>
+          <p:nvPr/>
+        </p:nvSpPr>
+        <p:spPr>
+          <a:xfrm>
+            <a:off x="731520" y="4343400"/>
+            <a:ext cx="1742846" cy="274320"/>
+          </a:xfrm>
+          <a:prstGeom prst="rect">
+            <a:avLst/>
+          </a:prstGeom>
+          <a:noFill/>
+          <a:ln/>
+        </p:spPr>
+        <p:txBody>
+          <a:bodyPr wrap="square" lIns="0" tIns="0" rIns="0" bIns="0" rtlCol="0" anchor="ctr"/>
+          <a:lstStyle/>
+          <a:p>
+            <a:pPr indent="0" marL="0">
+              <a:buNone/>
+            </a:pPr>
+            <a:r>
+              <a:rPr lang="en-US" sz="1100" dirty="0">
+                <a:solidFill>
+                  <a:srgbClr val="8A8A8A"/>
+                </a:solidFill>
+                <a:latin typeface="Noto Sans TC" pitchFamily="34" charset="0"/>
+                <a:ea typeface="Noto Sans TC" pitchFamily="34" charset="-122"/>
+                <a:cs typeface="Noto Sans TC" pitchFamily="34" charset="-120"/>
+              </a:rPr>
+              <a:t>進行方式</a:t>
+            </a:r>
+            <a:endParaRPr lang="en-US" sz="1100" dirty="0"/>
+          </a:p>
+        </p:txBody>
+      </p:sp>
+      <p:sp>
+        <p:nvSpPr>
+          <p:cNvPr id="10" name="Text 8"/>
+          <p:cNvSpPr txBox="1"/>
+          <p:nvPr/>
+        </p:nvSpPr>
+        <p:spPr>
+          <a:xfrm>
+            <a:off x="731520" y="4599432"/>
+            <a:ext cx="1742846" cy="320040"/>
+          </a:xfrm>
+          <a:prstGeom prst="rect">
+            <a:avLst/>
+          </a:prstGeom>
+          <a:noFill/>
+          <a:ln/>
+        </p:spPr>
+        <p:txBody>
+          <a:bodyPr wrap="square" lIns="0" tIns="0" rIns="0" bIns="0" rtlCol="0" anchor="ctr"/>
+          <a:lstStyle/>
+          <a:p>
+            <a:pPr indent="0" marL="0">
+              <a:buNone/>
+            </a:pPr>
+            <a:r>
+              <a:rPr lang="en-US" sz="1300" b="1" dirty="0">
+                <a:solidFill>
+                  <a:srgbClr val="414141"/>
+                </a:solidFill>
+                <a:latin typeface="Noto Sans TC" pitchFamily="34" charset="0"/>
+                <a:ea typeface="Noto Sans TC" pitchFamily="34" charset="-122"/>
+                <a:cs typeface="Noto Sans TC" pitchFamily="34" charset="-120"/>
+              </a:rPr>
+              <a:t>團體分組</a:t>
+            </a:r>
+            <a:endParaRPr lang="en-US" sz="1300" dirty="0"/>
+          </a:p>
+        </p:txBody>
+      </p:sp>
+      <p:sp>
+        <p:nvSpPr>
+          <p:cNvPr id="11" name="Text 9"/>
+          <p:cNvSpPr txBox="1"/>
+          <p:nvPr/>
+        </p:nvSpPr>
+        <p:spPr>
+          <a:xfrm>
+            <a:off x="731520" y="4983480"/>
+            <a:ext cx="1742846" cy="274320"/>
+          </a:xfrm>
+          <a:prstGeom prst="rect">
+            <a:avLst/>
+          </a:prstGeom>
+          <a:noFill/>
+          <a:ln/>
+        </p:spPr>
+        <p:txBody>
+          <a:bodyPr wrap="square" lIns="0" tIns="0" rIns="0" bIns="0" rtlCol="0" anchor="ctr"/>
+          <a:lstStyle/>
+          <a:p>
+            <a:pPr indent="0" marL="0">
+              <a:buNone/>
+            </a:pPr>
+            <a:r>
+              <a:rPr lang="en-US" sz="1100" dirty="0">
+                <a:solidFill>
+                  <a:srgbClr val="8A8A8A"/>
+                </a:solidFill>
+                <a:latin typeface="Noto Sans TC" pitchFamily="34" charset="0"/>
+                <a:ea typeface="Noto Sans TC" pitchFamily="34" charset="-122"/>
+                <a:cs typeface="Noto Sans TC" pitchFamily="34" charset="-120"/>
+              </a:rPr>
+              <a:t>個案舉例</a:t>
+            </a:r>
+            <a:endParaRPr lang="en-US" sz="1100" dirty="0"/>
+          </a:p>
+        </p:txBody>
+      </p:sp>
+      <p:sp>
+        <p:nvSpPr>
+          <p:cNvPr id="12" name="Text 10"/>
+          <p:cNvSpPr txBox="1"/>
+          <p:nvPr/>
+        </p:nvSpPr>
+        <p:spPr>
+          <a:xfrm>
+            <a:off x="731520" y="5212080"/>
+            <a:ext cx="1742846" cy="685800"/>
+          </a:xfrm>
+          <a:prstGeom prst="rect">
+            <a:avLst/>
+          </a:prstGeom>
+          <a:noFill/>
+          <a:ln/>
+        </p:spPr>
+        <p:txBody>
+          <a:bodyPr wrap="square" lIns="0" tIns="0" rIns="0" bIns="0" rtlCol="0" anchor="t"/>
+          <a:lstStyle/>
+          <a:p>
+            <a:pPr indent="0" marL="0">
+              <a:lnSpc>
+                <a:spcPct val="95000"/>
+              </a:lnSpc>
+              <a:buNone/>
+            </a:pPr>
+            <a:r>
+              <a:rPr lang="en-US" sz="1200" dirty="0">
+                <a:solidFill>
+                  <a:srgbClr val="414141"/>
+                </a:solidFill>
+                <a:latin typeface="Noto Sans TC" pitchFamily="34" charset="0"/>
+                <a:ea typeface="Noto Sans TC" pitchFamily="34" charset="-122"/>
+                <a:cs typeface="Noto Sans TC" pitchFamily="34" charset="-120"/>
+              </a:rPr>
+              <a:t>iCHEF</a:t>
+            </a:r>
+            <a:endParaRPr lang="en-US" sz="1200" dirty="0"/>
+          </a:p>
+          <a:p>
+            <a:pPr indent="0" marL="0">
+              <a:lnSpc>
+                <a:spcPct val="95000"/>
+              </a:lnSpc>
+              <a:buNone/>
+            </a:pPr>
+            <a:r>
+              <a:rPr lang="en-US" sz="1200" dirty="0">
+                <a:solidFill>
+                  <a:srgbClr val="414141"/>
+                </a:solidFill>
+                <a:latin typeface="Noto Sans TC" pitchFamily="34" charset="0"/>
+                <a:ea typeface="Noto Sans TC" pitchFamily="34" charset="-122"/>
+                <a:cs typeface="Noto Sans TC" pitchFamily="34" charset="-120"/>
+              </a:rPr>
+              <a:t>whoscall</a:t>
+            </a:r>
+            <a:endParaRPr lang="en-US" sz="1200" dirty="0"/>
+          </a:p>
+          <a:p>
+            <a:pPr indent="0" marL="0">
+              <a:lnSpc>
+                <a:spcPct val="95000"/>
+              </a:lnSpc>
+              <a:buNone/>
+            </a:pPr>
+            <a:r>
+              <a:rPr lang="en-US" sz="1200" dirty="0">
+                <a:solidFill>
+                  <a:srgbClr val="414141"/>
+                </a:solidFill>
+                <a:latin typeface="Noto Sans TC" pitchFamily="34" charset="0"/>
+                <a:ea typeface="Noto Sans TC" pitchFamily="34" charset="-122"/>
+                <a:cs typeface="Noto Sans TC" pitchFamily="34" charset="-120"/>
+              </a:rPr>
+              <a:t>Ragic</a:t>
+            </a:r>
+            <a:endParaRPr lang="en-US" sz="1200" dirty="0"/>
+          </a:p>
+        </p:txBody>
+      </p:sp>
+      <p:sp>
+        <p:nvSpPr>
+          <p:cNvPr id="13" name="Shape 11"/>
+          <p:cNvSpPr/>
+          <p:nvPr/>
+        </p:nvSpPr>
+        <p:spPr>
+          <a:xfrm>
+            <a:off x="1331366" y="2542032"/>
+            <a:ext cx="1234440" cy="329184"/>
+          </a:xfrm>
+          <a:custGeom>
+            <a:avLst/>
+            <a:gdLst/>
+            <a:ahLst/>
+            <a:cxnLst/>
+            <a:rect l="l" t="t" r="r" b="b"/>
+            <a:pathLst>
+              <a:path w="1234440" h="329184">
+                <a:moveTo>
+                  <a:pt x="0" y="0"/>
+                </a:moveTo>
+                <a:lnTo>
+                  <a:pt x="1234440" y="0"/>
+                </a:lnTo>
+                <a:lnTo>
+                  <a:pt x="1124712" y="329184"/>
+                </a:lnTo>
+                <a:lnTo>
+                  <a:pt x="0" y="329184"/>
+                </a:lnTo>
+                <a:close/>
+              </a:path>
+            </a:pathLst>
+          </a:custGeom>
+          <a:solidFill>
+            <a:srgbClr val="FF9E3E"/>
+          </a:solidFill>
+          <a:ln w="12700">
+            <a:solidFill>
+              <a:srgbClr val="FF9E3E">
+                <a:alpha val="0"/>
+              </a:srgbClr>
+            </a:solidFill>
+            <a:prstDash val="solid"/>
+          </a:ln>
+        </p:spPr>
+      </p:sp>
+      <p:sp>
+        <p:nvSpPr>
+          <p:cNvPr id="14" name="Text 12"/>
+          <p:cNvSpPr txBox="1"/>
+          <p:nvPr/>
+        </p:nvSpPr>
+        <p:spPr>
+          <a:xfrm>
+            <a:off x="1395374" y="2542032"/>
+            <a:ext cx="1097280" cy="329184"/>
+          </a:xfrm>
+          <a:prstGeom prst="rect">
+            <a:avLst/>
+          </a:prstGeom>
+          <a:noFill/>
+          <a:ln/>
+        </p:spPr>
+        <p:txBody>
+          <a:bodyPr wrap="square" lIns="0" tIns="0" rIns="0" bIns="0" rtlCol="0" anchor="ctr"/>
+          <a:lstStyle/>
+          <a:p>
+            <a:pPr indent="0" marL="0">
+              <a:buNone/>
+            </a:pPr>
+            <a:r>
+              <a:rPr lang="en-US" sz="1200" b="1" dirty="0">
+                <a:solidFill>
+                  <a:srgbClr val="FFFFFF"/>
+                </a:solidFill>
+                <a:latin typeface="Noto Sans TC" pitchFamily="34" charset="0"/>
+                <a:ea typeface="Noto Sans TC" pitchFamily="34" charset="-122"/>
+                <a:cs typeface="Noto Sans TC" pitchFamily="34" charset="-120"/>
+              </a:rPr>
+              <a:t>現在在這裡</a:t>
+            </a:r>
+            <a:endParaRPr lang="en-US" sz="1200" dirty="0"/>
+          </a:p>
+        </p:txBody>
+      </p:sp>
+      <p:sp>
+        <p:nvSpPr>
+          <p:cNvPr id="15" name="Shape 13"/>
+          <p:cNvSpPr/>
+          <p:nvPr/>
+        </p:nvSpPr>
+        <p:spPr>
+          <a:xfrm>
+            <a:off x="2794406" y="1965960"/>
+            <a:ext cx="2154326" cy="548640"/>
+          </a:xfrm>
+          <a:custGeom>
+            <a:avLst/>
+            <a:gdLst/>
+            <a:ahLst/>
+            <a:cxnLst/>
+            <a:rect l="l" t="t" r="r" b="b"/>
+            <a:pathLst>
+              <a:path w="2154326" h="548640">
+                <a:moveTo>
+                  <a:pt x="0" y="0"/>
+                </a:moveTo>
+                <a:lnTo>
+                  <a:pt x="2154326" y="0"/>
+                </a:lnTo>
+                <a:lnTo>
+                  <a:pt x="1971446" y="548640"/>
+                </a:lnTo>
+                <a:lnTo>
+                  <a:pt x="0" y="548640"/>
+                </a:lnTo>
+                <a:close/>
+              </a:path>
+            </a:pathLst>
+          </a:custGeom>
+          <a:solidFill>
+            <a:srgbClr val="E5E5E5"/>
+          </a:solidFill>
+          <a:ln w="12700">
+            <a:solidFill>
+              <a:srgbClr val="E5E5E5">
+                <a:alpha val="0"/>
+              </a:srgbClr>
+            </a:solidFill>
+            <a:prstDash val="solid"/>
+          </a:ln>
+        </p:spPr>
+      </p:sp>
+      <p:sp>
+        <p:nvSpPr>
+          <p:cNvPr id="16" name="Text 14"/>
+          <p:cNvSpPr txBox="1"/>
+          <p:nvPr/>
+        </p:nvSpPr>
+        <p:spPr>
+          <a:xfrm>
+            <a:off x="2931566" y="1965960"/>
+            <a:ext cx="1834286" cy="548640"/>
+          </a:xfrm>
+          <a:prstGeom prst="rect">
+            <a:avLst/>
+          </a:prstGeom>
+          <a:noFill/>
+          <a:ln/>
+        </p:spPr>
+        <p:txBody>
+          <a:bodyPr wrap="square" lIns="0" tIns="0" rIns="0" bIns="0" rtlCol="0" anchor="ctr"/>
+          <a:lstStyle/>
+          <a:p>
+            <a:pPr indent="0" marL="0">
+              <a:buNone/>
+            </a:pPr>
+            <a:r>
+              <a:rPr lang="en-US" sz="1300" b="1" dirty="0">
+                <a:solidFill>
+                  <a:srgbClr val="414141"/>
+                </a:solidFill>
+                <a:latin typeface="Poppins SemiBold" pitchFamily="34" charset="0"/>
+                <a:ea typeface="Poppins SemiBold" pitchFamily="34" charset="-122"/>
+                <a:cs typeface="Poppins SemiBold" pitchFamily="34" charset="-120"/>
+              </a:rPr>
+              <a:t>R2  </a:t>
+            </a:r>
+            <a:pPr indent="0" marL="0">
+              <a:buNone/>
+            </a:pPr>
+            <a:r>
+              <a:rPr lang="en-US" sz="1300" dirty="0">
+                <a:solidFill>
+                  <a:srgbClr val="414141"/>
+                </a:solidFill>
+                <a:latin typeface="Poppins SemiBold" pitchFamily="34" charset="0"/>
+                <a:ea typeface="Poppins SemiBold" pitchFamily="34" charset="-122"/>
+                <a:cs typeface="Poppins SemiBold" pitchFamily="34" charset="-120"/>
+              </a:rPr>
+              <a:t>2026.11–12</a:t>
+            </a:r>
+            <a:endParaRPr lang="en-US" sz="1300" dirty="0"/>
+          </a:p>
+        </p:txBody>
+      </p:sp>
+      <p:sp>
+        <p:nvSpPr>
+          <p:cNvPr id="17" name="Shape 15"/>
+          <p:cNvSpPr/>
+          <p:nvPr/>
+        </p:nvSpPr>
+        <p:spPr>
+          <a:xfrm>
+            <a:off x="2794406" y="2697480"/>
+            <a:ext cx="2108606" cy="3246120"/>
+          </a:xfrm>
+          <a:prstGeom prst="rect">
+            <a:avLst/>
+          </a:prstGeom>
+          <a:solidFill>
+            <a:srgbClr val="FFFFFF"/>
+          </a:solidFill>
+          <a:ln w="12700">
+            <a:solidFill>
+              <a:srgbClr val="E5E5E5"/>
+            </a:solidFill>
+            <a:prstDash val="solid"/>
+          </a:ln>
+        </p:spPr>
+      </p:sp>
+      <p:sp>
+        <p:nvSpPr>
+          <p:cNvPr id="18" name="Text 16"/>
+          <p:cNvSpPr txBox="1"/>
+          <p:nvPr/>
+        </p:nvSpPr>
+        <p:spPr>
+          <a:xfrm>
+            <a:off x="2977286" y="2880360"/>
+            <a:ext cx="1742846" cy="457200"/>
+          </a:xfrm>
+          <a:prstGeom prst="rect">
+            <a:avLst/>
+          </a:prstGeom>
+          <a:noFill/>
+          <a:ln/>
+        </p:spPr>
+        <p:txBody>
+          <a:bodyPr wrap="square" lIns="0" tIns="0" rIns="0" bIns="0" rtlCol="0" anchor="ctr"/>
+          <a:lstStyle/>
+          <a:p>
+            <a:pPr indent="0" marL="0">
+              <a:buNone/>
+            </a:pPr>
+            <a:r>
+              <a:rPr lang="en-US" sz="1800" b="1" dirty="0">
+                <a:solidFill>
+                  <a:srgbClr val="414141"/>
+                </a:solidFill>
+                <a:latin typeface="Noto Sans TC" pitchFamily="34" charset="0"/>
+                <a:ea typeface="Noto Sans TC" pitchFamily="34" charset="-122"/>
+                <a:cs typeface="Noto Sans TC" pitchFamily="34" charset="-120"/>
+              </a:rPr>
+              <a:t>交易抽成／媒合</a:t>
+            </a:r>
+            <a:endParaRPr lang="en-US" sz="1800" dirty="0"/>
+          </a:p>
+        </p:txBody>
+      </p:sp>
+      <p:sp>
+        <p:nvSpPr>
+          <p:cNvPr id="19" name="Text 17"/>
+          <p:cNvSpPr txBox="1"/>
+          <p:nvPr/>
+        </p:nvSpPr>
+        <p:spPr>
+          <a:xfrm>
+            <a:off x="2977286" y="3383280"/>
+            <a:ext cx="1742846" cy="868680"/>
+          </a:xfrm>
+          <a:prstGeom prst="rect">
+            <a:avLst/>
+          </a:prstGeom>
+          <a:noFill/>
+          <a:ln/>
+        </p:spPr>
+        <p:txBody>
+          <a:bodyPr wrap="square" lIns="0" tIns="0" rIns="0" bIns="0" rtlCol="0" anchor="t"/>
+          <a:lstStyle/>
+          <a:p>
+            <a:pPr indent="0" marL="0">
+              <a:buNone/>
+            </a:pPr>
+            <a:r>
+              <a:rPr lang="en-US" sz="1300" dirty="0">
+                <a:solidFill>
+                  <a:srgbClr val="414141"/>
+                </a:solidFill>
+                <a:latin typeface="Noto Sans TC" pitchFamily="34" charset="0"/>
+                <a:ea typeface="Noto Sans TC" pitchFamily="34" charset="-122"/>
+                <a:cs typeface="Noto Sans TC" pitchFamily="34" charset="-120"/>
+              </a:rPr>
+              <a:t>每筆交易或媒合成功，抽一定比例</a:t>
+            </a:r>
+            <a:endParaRPr lang="en-US" sz="1300" dirty="0"/>
+          </a:p>
+        </p:txBody>
+      </p:sp>
+      <p:sp>
+        <p:nvSpPr>
+          <p:cNvPr id="20" name="Text 18"/>
+          <p:cNvSpPr txBox="1"/>
+          <p:nvPr/>
+        </p:nvSpPr>
+        <p:spPr>
+          <a:xfrm>
+            <a:off x="2977286" y="4343400"/>
+            <a:ext cx="1742846" cy="274320"/>
+          </a:xfrm>
+          <a:prstGeom prst="rect">
+            <a:avLst/>
+          </a:prstGeom>
+          <a:noFill/>
+          <a:ln/>
+        </p:spPr>
+        <p:txBody>
+          <a:bodyPr wrap="square" lIns="0" tIns="0" rIns="0" bIns="0" rtlCol="0" anchor="ctr"/>
+          <a:lstStyle/>
+          <a:p>
+            <a:pPr indent="0" marL="0">
+              <a:buNone/>
+            </a:pPr>
+            <a:r>
+              <a:rPr lang="en-US" sz="1100" dirty="0">
+                <a:solidFill>
+                  <a:srgbClr val="8A8A8A"/>
+                </a:solidFill>
+                <a:latin typeface="Noto Sans TC" pitchFamily="34" charset="0"/>
+                <a:ea typeface="Noto Sans TC" pitchFamily="34" charset="-122"/>
+                <a:cs typeface="Noto Sans TC" pitchFamily="34" charset="-120"/>
+              </a:rPr>
+              <a:t>進行方式</a:t>
+            </a:r>
+            <a:endParaRPr lang="en-US" sz="1100" dirty="0"/>
+          </a:p>
+        </p:txBody>
+      </p:sp>
+      <p:sp>
+        <p:nvSpPr>
+          <p:cNvPr id="21" name="Text 19"/>
+          <p:cNvSpPr txBox="1"/>
+          <p:nvPr/>
+        </p:nvSpPr>
+        <p:spPr>
+          <a:xfrm>
+            <a:off x="2977286" y="4599432"/>
+            <a:ext cx="1742846" cy="320040"/>
+          </a:xfrm>
+          <a:prstGeom prst="rect">
+            <a:avLst/>
+          </a:prstGeom>
+          <a:noFill/>
+          <a:ln/>
+        </p:spPr>
+        <p:txBody>
+          <a:bodyPr wrap="square" lIns="0" tIns="0" rIns="0" bIns="0" rtlCol="0" anchor="ctr"/>
+          <a:lstStyle/>
+          <a:p>
+            <a:pPr indent="0" marL="0">
+              <a:buNone/>
+            </a:pPr>
+            <a:r>
+              <a:rPr lang="en-US" sz="1300" b="1" dirty="0">
+                <a:solidFill>
+                  <a:srgbClr val="414141"/>
+                </a:solidFill>
+                <a:latin typeface="Noto Sans TC" pitchFamily="34" charset="0"/>
+                <a:ea typeface="Noto Sans TC" pitchFamily="34" charset="-122"/>
+                <a:cs typeface="Noto Sans TC" pitchFamily="34" charset="-120"/>
+              </a:rPr>
+              <a:t>個人</a:t>
+            </a:r>
+            <a:endParaRPr lang="en-US" sz="1300" dirty="0"/>
+          </a:p>
+        </p:txBody>
+      </p:sp>
+      <p:sp>
+        <p:nvSpPr>
+          <p:cNvPr id="22" name="Text 20"/>
+          <p:cNvSpPr txBox="1"/>
+          <p:nvPr/>
+        </p:nvSpPr>
+        <p:spPr>
+          <a:xfrm>
+            <a:off x="2977286" y="4983480"/>
+            <a:ext cx="1742846" cy="274320"/>
+          </a:xfrm>
+          <a:prstGeom prst="rect">
+            <a:avLst/>
+          </a:prstGeom>
+          <a:noFill/>
+          <a:ln/>
+        </p:spPr>
+        <p:txBody>
+          <a:bodyPr wrap="square" lIns="0" tIns="0" rIns="0" bIns="0" rtlCol="0" anchor="ctr"/>
+          <a:lstStyle/>
+          <a:p>
+            <a:pPr indent="0" marL="0">
+              <a:buNone/>
+            </a:pPr>
+            <a:r>
+              <a:rPr lang="en-US" sz="1100" dirty="0">
+                <a:solidFill>
+                  <a:srgbClr val="8A8A8A"/>
+                </a:solidFill>
+                <a:latin typeface="Noto Sans TC" pitchFamily="34" charset="0"/>
+                <a:ea typeface="Noto Sans TC" pitchFamily="34" charset="-122"/>
+                <a:cs typeface="Noto Sans TC" pitchFamily="34" charset="-120"/>
+              </a:rPr>
+              <a:t>個案舉例</a:t>
+            </a:r>
+            <a:endParaRPr lang="en-US" sz="1100" dirty="0"/>
+          </a:p>
+        </p:txBody>
+      </p:sp>
+      <p:sp>
+        <p:nvSpPr>
+          <p:cNvPr id="23" name="Text 21"/>
+          <p:cNvSpPr txBox="1"/>
+          <p:nvPr/>
+        </p:nvSpPr>
+        <p:spPr>
+          <a:xfrm>
+            <a:off x="2977286" y="5212080"/>
+            <a:ext cx="1742846" cy="685800"/>
+          </a:xfrm>
+          <a:prstGeom prst="rect">
+            <a:avLst/>
+          </a:prstGeom>
+          <a:noFill/>
+          <a:ln/>
+        </p:spPr>
+        <p:txBody>
+          <a:bodyPr wrap="square" lIns="0" tIns="0" rIns="0" bIns="0" rtlCol="0" anchor="t"/>
+          <a:lstStyle/>
+          <a:p>
+            <a:pPr indent="0" marL="0">
+              <a:lnSpc>
+                <a:spcPct val="95000"/>
+              </a:lnSpc>
+              <a:buNone/>
+            </a:pPr>
+            <a:r>
+              <a:rPr lang="en-US" sz="1200" dirty="0">
+                <a:solidFill>
+                  <a:srgbClr val="414141"/>
+                </a:solidFill>
+                <a:latin typeface="Noto Sans TC" pitchFamily="34" charset="0"/>
+                <a:ea typeface="Noto Sans TC" pitchFamily="34" charset="-122"/>
+                <a:cs typeface="Noto Sans TC" pitchFamily="34" charset="-120"/>
+              </a:rPr>
+              <a:t>TapPay</a:t>
+            </a:r>
+            <a:endParaRPr lang="en-US" sz="1200" dirty="0"/>
+          </a:p>
+          <a:p>
+            <a:pPr indent="0" marL="0">
+              <a:lnSpc>
+                <a:spcPct val="95000"/>
+              </a:lnSpc>
+              <a:buNone/>
+            </a:pPr>
+            <a:r>
+              <a:rPr lang="en-US" sz="1200" dirty="0">
+                <a:solidFill>
+                  <a:srgbClr val="414141"/>
+                </a:solidFill>
+                <a:latin typeface="Noto Sans TC" pitchFamily="34" charset="0"/>
+                <a:ea typeface="Noto Sans TC" pitchFamily="34" charset="-122"/>
+                <a:cs typeface="Noto Sans TC" pitchFamily="34" charset="-120"/>
+              </a:rPr>
+              <a:t>AmazingTalker</a:t>
+            </a:r>
+            <a:endParaRPr lang="en-US" sz="1200" dirty="0"/>
+          </a:p>
+          <a:p>
+            <a:pPr indent="0" marL="0">
+              <a:lnSpc>
+                <a:spcPct val="95000"/>
+              </a:lnSpc>
+              <a:buNone/>
+            </a:pPr>
+            <a:r>
+              <a:rPr lang="en-US" sz="1200" dirty="0">
+                <a:solidFill>
+                  <a:srgbClr val="414141"/>
+                </a:solidFill>
+                <a:latin typeface="Noto Sans TC" pitchFamily="34" charset="0"/>
+                <a:ea typeface="Noto Sans TC" pitchFamily="34" charset="-122"/>
+                <a:cs typeface="Noto Sans TC" pitchFamily="34" charset="-120"/>
+              </a:rPr>
+              <a:t>FunNow</a:t>
+            </a:r>
+            <a:endParaRPr lang="en-US" sz="1200" dirty="0"/>
+          </a:p>
+        </p:txBody>
+      </p:sp>
+      <p:sp>
+        <p:nvSpPr>
+          <p:cNvPr id="24" name="Shape 22"/>
+          <p:cNvSpPr/>
+          <p:nvPr/>
+        </p:nvSpPr>
+        <p:spPr>
+          <a:xfrm>
+            <a:off x="5040173" y="1965960"/>
+            <a:ext cx="2154326" cy="548640"/>
+          </a:xfrm>
+          <a:custGeom>
+            <a:avLst/>
+            <a:gdLst/>
+            <a:ahLst/>
+            <a:cxnLst/>
+            <a:rect l="l" t="t" r="r" b="b"/>
+            <a:pathLst>
+              <a:path w="2154326" h="548640">
+                <a:moveTo>
+                  <a:pt x="0" y="0"/>
+                </a:moveTo>
+                <a:lnTo>
+                  <a:pt x="2154326" y="0"/>
+                </a:lnTo>
+                <a:lnTo>
+                  <a:pt x="1971446" y="548640"/>
+                </a:lnTo>
+                <a:lnTo>
+                  <a:pt x="0" y="548640"/>
+                </a:lnTo>
+                <a:close/>
+              </a:path>
+            </a:pathLst>
+          </a:custGeom>
+          <a:solidFill>
+            <a:srgbClr val="E5E5E5"/>
+          </a:solidFill>
+          <a:ln w="12700">
+            <a:solidFill>
+              <a:srgbClr val="E5E5E5">
+                <a:alpha val="0"/>
+              </a:srgbClr>
+            </a:solidFill>
+            <a:prstDash val="solid"/>
+          </a:ln>
+        </p:spPr>
+      </p:sp>
+      <p:sp>
+        <p:nvSpPr>
+          <p:cNvPr id="25" name="Text 23"/>
+          <p:cNvSpPr txBox="1"/>
+          <p:nvPr/>
+        </p:nvSpPr>
+        <p:spPr>
+          <a:xfrm>
+            <a:off x="5177333" y="1965960"/>
+            <a:ext cx="1834286" cy="548640"/>
+          </a:xfrm>
+          <a:prstGeom prst="rect">
+            <a:avLst/>
+          </a:prstGeom>
+          <a:noFill/>
+          <a:ln/>
+        </p:spPr>
+        <p:txBody>
+          <a:bodyPr wrap="square" lIns="0" tIns="0" rIns="0" bIns="0" rtlCol="0" anchor="ctr"/>
+          <a:lstStyle/>
+          <a:p>
+            <a:pPr indent="0" marL="0">
+              <a:buNone/>
+            </a:pPr>
+            <a:r>
+              <a:rPr lang="en-US" sz="1300" b="1" dirty="0">
+                <a:solidFill>
+                  <a:srgbClr val="414141"/>
+                </a:solidFill>
+                <a:latin typeface="Poppins SemiBold" pitchFamily="34" charset="0"/>
+                <a:ea typeface="Poppins SemiBold" pitchFamily="34" charset="-122"/>
+                <a:cs typeface="Poppins SemiBold" pitchFamily="34" charset="-120"/>
+              </a:rPr>
+              <a:t>R3  </a:t>
+            </a:r>
+            <a:pPr indent="0" marL="0">
+              <a:buNone/>
+            </a:pPr>
+            <a:r>
+              <a:rPr lang="en-US" sz="1300" dirty="0">
+                <a:solidFill>
+                  <a:srgbClr val="414141"/>
+                </a:solidFill>
+                <a:latin typeface="Poppins SemiBold" pitchFamily="34" charset="0"/>
+                <a:ea typeface="Poppins SemiBold" pitchFamily="34" charset="-122"/>
+                <a:cs typeface="Poppins SemiBold" pitchFamily="34" charset="-120"/>
+              </a:rPr>
+              <a:t>2027.01–02</a:t>
+            </a:r>
+            <a:endParaRPr lang="en-US" sz="1300" dirty="0"/>
+          </a:p>
+        </p:txBody>
+      </p:sp>
+      <p:sp>
+        <p:nvSpPr>
+          <p:cNvPr id="26" name="Shape 24"/>
+          <p:cNvSpPr/>
+          <p:nvPr/>
+        </p:nvSpPr>
+        <p:spPr>
+          <a:xfrm>
+            <a:off x="5040173" y="2697480"/>
+            <a:ext cx="2108606" cy="3246120"/>
+          </a:xfrm>
+          <a:prstGeom prst="rect">
+            <a:avLst/>
+          </a:prstGeom>
+          <a:solidFill>
+            <a:srgbClr val="FFFFFF"/>
+          </a:solidFill>
+          <a:ln w="12700">
+            <a:solidFill>
+              <a:srgbClr val="E5E5E5"/>
+            </a:solidFill>
+            <a:prstDash val="solid"/>
+          </a:ln>
+        </p:spPr>
+      </p:sp>
+      <p:sp>
+        <p:nvSpPr>
+          <p:cNvPr id="27" name="Text 25"/>
+          <p:cNvSpPr txBox="1"/>
+          <p:nvPr/>
+        </p:nvSpPr>
+        <p:spPr>
+          <a:xfrm>
+            <a:off x="5223053" y="2880360"/>
+            <a:ext cx="1742846" cy="457200"/>
+          </a:xfrm>
+          <a:prstGeom prst="rect">
+            <a:avLst/>
+          </a:prstGeom>
+          <a:noFill/>
+          <a:ln/>
+        </p:spPr>
+        <p:txBody>
+          <a:bodyPr wrap="square" lIns="0" tIns="0" rIns="0" bIns="0" rtlCol="0" anchor="ctr"/>
+          <a:lstStyle/>
+          <a:p>
+            <a:pPr indent="0" marL="0">
+              <a:buNone/>
+            </a:pPr>
+            <a:r>
+              <a:rPr lang="en-US" sz="1800" b="1" dirty="0">
+                <a:solidFill>
+                  <a:srgbClr val="414141"/>
+                </a:solidFill>
+                <a:latin typeface="Noto Sans TC" pitchFamily="34" charset="0"/>
+                <a:ea typeface="Noto Sans TC" pitchFamily="34" charset="-122"/>
+                <a:cs typeface="Noto Sans TC" pitchFamily="34" charset="-120"/>
+              </a:rPr>
+              <a:t>產品賣斷</a:t>
+            </a:r>
+            <a:endParaRPr lang="en-US" sz="1800" dirty="0"/>
+          </a:p>
+        </p:txBody>
+      </p:sp>
+      <p:sp>
+        <p:nvSpPr>
+          <p:cNvPr id="28" name="Text 26"/>
+          <p:cNvSpPr txBox="1"/>
+          <p:nvPr/>
+        </p:nvSpPr>
+        <p:spPr>
+          <a:xfrm>
+            <a:off x="5223053" y="3383280"/>
+            <a:ext cx="1742846" cy="868680"/>
+          </a:xfrm>
+          <a:prstGeom prst="rect">
+            <a:avLst/>
+          </a:prstGeom>
+          <a:noFill/>
+          <a:ln/>
+        </p:spPr>
+        <p:txBody>
+          <a:bodyPr wrap="square" lIns="0" tIns="0" rIns="0" bIns="0" rtlCol="0" anchor="t"/>
+          <a:lstStyle/>
+          <a:p>
+            <a:pPr indent="0" marL="0">
+              <a:buNone/>
+            </a:pPr>
+            <a:r>
+              <a:rPr lang="en-US" sz="1300" dirty="0">
+                <a:solidFill>
+                  <a:srgbClr val="414141"/>
+                </a:solidFill>
+                <a:latin typeface="Noto Sans TC" pitchFamily="34" charset="0"/>
+                <a:ea typeface="Noto Sans TC" pitchFamily="34" charset="-122"/>
+                <a:cs typeface="Noto Sans TC" pitchFamily="34" charset="-120"/>
+              </a:rPr>
+              <a:t>一次賣出硬體或實體商品</a:t>
+            </a:r>
+            <a:endParaRPr lang="en-US" sz="1300" dirty="0"/>
+          </a:p>
+        </p:txBody>
+      </p:sp>
+      <p:sp>
+        <p:nvSpPr>
+          <p:cNvPr id="29" name="Text 27"/>
+          <p:cNvSpPr txBox="1"/>
+          <p:nvPr/>
+        </p:nvSpPr>
+        <p:spPr>
+          <a:xfrm>
+            <a:off x="5223053" y="4343400"/>
+            <a:ext cx="1742846" cy="274320"/>
+          </a:xfrm>
+          <a:prstGeom prst="rect">
+            <a:avLst/>
+          </a:prstGeom>
+          <a:noFill/>
+          <a:ln/>
+        </p:spPr>
+        <p:txBody>
+          <a:bodyPr wrap="square" lIns="0" tIns="0" rIns="0" bIns="0" rtlCol="0" anchor="ctr"/>
+          <a:lstStyle/>
+          <a:p>
+            <a:pPr indent="0" marL="0">
+              <a:buNone/>
+            </a:pPr>
+            <a:r>
+              <a:rPr lang="en-US" sz="1100" dirty="0">
+                <a:solidFill>
+                  <a:srgbClr val="8A8A8A"/>
+                </a:solidFill>
+                <a:latin typeface="Noto Sans TC" pitchFamily="34" charset="0"/>
+                <a:ea typeface="Noto Sans TC" pitchFamily="34" charset="-122"/>
+                <a:cs typeface="Noto Sans TC" pitchFamily="34" charset="-120"/>
+              </a:rPr>
+              <a:t>進行方式</a:t>
+            </a:r>
+            <a:endParaRPr lang="en-US" sz="1100" dirty="0"/>
+          </a:p>
+        </p:txBody>
+      </p:sp>
+      <p:sp>
+        <p:nvSpPr>
+          <p:cNvPr id="30" name="Text 28"/>
+          <p:cNvSpPr txBox="1"/>
+          <p:nvPr/>
+        </p:nvSpPr>
+        <p:spPr>
+          <a:xfrm>
+            <a:off x="5223053" y="4599432"/>
+            <a:ext cx="1742846" cy="320040"/>
+          </a:xfrm>
+          <a:prstGeom prst="rect">
+            <a:avLst/>
+          </a:prstGeom>
+          <a:noFill/>
+          <a:ln/>
+        </p:spPr>
+        <p:txBody>
+          <a:bodyPr wrap="square" lIns="0" tIns="0" rIns="0" bIns="0" rtlCol="0" anchor="ctr"/>
+          <a:lstStyle/>
+          <a:p>
+            <a:pPr indent="0" marL="0">
+              <a:buNone/>
+            </a:pPr>
+            <a:r>
+              <a:rPr lang="en-US" sz="1300" b="1" dirty="0">
+                <a:solidFill>
+                  <a:srgbClr val="414141"/>
+                </a:solidFill>
+                <a:latin typeface="Noto Sans TC" pitchFamily="34" charset="0"/>
+                <a:ea typeface="Noto Sans TC" pitchFamily="34" charset="-122"/>
+                <a:cs typeface="Noto Sans TC" pitchFamily="34" charset="-120"/>
+              </a:rPr>
+              <a:t>個人</a:t>
+            </a:r>
+            <a:endParaRPr lang="en-US" sz="1300" dirty="0"/>
+          </a:p>
+        </p:txBody>
+      </p:sp>
+      <p:sp>
+        <p:nvSpPr>
+          <p:cNvPr id="31" name="Text 29"/>
+          <p:cNvSpPr txBox="1"/>
+          <p:nvPr/>
+        </p:nvSpPr>
+        <p:spPr>
+          <a:xfrm>
+            <a:off x="5223053" y="4983480"/>
+            <a:ext cx="1742846" cy="274320"/>
+          </a:xfrm>
+          <a:prstGeom prst="rect">
+            <a:avLst/>
+          </a:prstGeom>
+          <a:noFill/>
+          <a:ln/>
+        </p:spPr>
+        <p:txBody>
+          <a:bodyPr wrap="square" lIns="0" tIns="0" rIns="0" bIns="0" rtlCol="0" anchor="ctr"/>
+          <a:lstStyle/>
+          <a:p>
+            <a:pPr indent="0" marL="0">
+              <a:buNone/>
+            </a:pPr>
+            <a:r>
+              <a:rPr lang="en-US" sz="1100" dirty="0">
+                <a:solidFill>
+                  <a:srgbClr val="8A8A8A"/>
+                </a:solidFill>
+                <a:latin typeface="Noto Sans TC" pitchFamily="34" charset="0"/>
+                <a:ea typeface="Noto Sans TC" pitchFamily="34" charset="-122"/>
+                <a:cs typeface="Noto Sans TC" pitchFamily="34" charset="-120"/>
+              </a:rPr>
+              <a:t>個案舉例</a:t>
+            </a:r>
+            <a:endParaRPr lang="en-US" sz="1100" dirty="0"/>
+          </a:p>
+        </p:txBody>
+      </p:sp>
+      <p:sp>
+        <p:nvSpPr>
+          <p:cNvPr id="32" name="Text 30"/>
+          <p:cNvSpPr txBox="1"/>
+          <p:nvPr/>
+        </p:nvSpPr>
+        <p:spPr>
+          <a:xfrm>
+            <a:off x="5223053" y="5212080"/>
+            <a:ext cx="1742846" cy="685800"/>
+          </a:xfrm>
+          <a:prstGeom prst="rect">
+            <a:avLst/>
+          </a:prstGeom>
+          <a:noFill/>
+          <a:ln/>
+        </p:spPr>
+        <p:txBody>
+          <a:bodyPr wrap="square" lIns="0" tIns="0" rIns="0" bIns="0" rtlCol="0" anchor="t"/>
+          <a:lstStyle/>
+          <a:p>
+            <a:pPr indent="0" marL="0">
+              <a:lnSpc>
+                <a:spcPct val="95000"/>
+              </a:lnSpc>
+              <a:buNone/>
+            </a:pPr>
+            <a:r>
+              <a:rPr lang="en-US" sz="1200" dirty="0">
+                <a:solidFill>
+                  <a:srgbClr val="414141"/>
+                </a:solidFill>
+                <a:latin typeface="Noto Sans TC" pitchFamily="34" charset="0"/>
+                <a:ea typeface="Noto Sans TC" pitchFamily="34" charset="-122"/>
+                <a:cs typeface="Noto Sans TC" pitchFamily="34" charset="-120"/>
+              </a:rPr>
+              <a:t>adonit</a:t>
+            </a:r>
+            <a:endParaRPr lang="en-US" sz="1200" dirty="0"/>
+          </a:p>
+          <a:p>
+            <a:pPr indent="0" marL="0">
+              <a:lnSpc>
+                <a:spcPct val="95000"/>
+              </a:lnSpc>
+              <a:buNone/>
+            </a:pPr>
+            <a:r>
+              <a:rPr lang="en-US" sz="1200" dirty="0">
+                <a:solidFill>
+                  <a:srgbClr val="414141"/>
+                </a:solidFill>
+                <a:latin typeface="Noto Sans TC" pitchFamily="34" charset="0"/>
+                <a:ea typeface="Noto Sans TC" pitchFamily="34" charset="-122"/>
+                <a:cs typeface="Noto Sans TC" pitchFamily="34" charset="-120"/>
+              </a:rPr>
+              <a:t>歐萊德</a:t>
+            </a:r>
+            <a:endParaRPr lang="en-US" sz="1200" dirty="0"/>
+          </a:p>
+          <a:p>
+            <a:pPr indent="0" marL="0">
+              <a:lnSpc>
+                <a:spcPct val="95000"/>
+              </a:lnSpc>
+              <a:buNone/>
+            </a:pPr>
+            <a:r>
+              <a:rPr lang="en-US" sz="1200" dirty="0">
+                <a:solidFill>
+                  <a:srgbClr val="414141"/>
+                </a:solidFill>
+                <a:latin typeface="Noto Sans TC" pitchFamily="34" charset="0"/>
+                <a:ea typeface="Noto Sans TC" pitchFamily="34" charset="-122"/>
+                <a:cs typeface="Noto Sans TC" pitchFamily="34" charset="-120"/>
+              </a:rPr>
+              <a:t>CACO</a:t>
+            </a:r>
+            <a:endParaRPr lang="en-US" sz="1200" dirty="0"/>
+          </a:p>
+        </p:txBody>
+      </p:sp>
+      <p:sp>
+        <p:nvSpPr>
+          <p:cNvPr id="33" name="Shape 31"/>
+          <p:cNvSpPr/>
+          <p:nvPr/>
+        </p:nvSpPr>
+        <p:spPr>
+          <a:xfrm>
+            <a:off x="7285939" y="1965960"/>
+            <a:ext cx="2154326" cy="548640"/>
+          </a:xfrm>
+          <a:custGeom>
+            <a:avLst/>
+            <a:gdLst/>
+            <a:ahLst/>
+            <a:cxnLst/>
+            <a:rect l="l" t="t" r="r" b="b"/>
+            <a:pathLst>
+              <a:path w="2154326" h="548640">
+                <a:moveTo>
+                  <a:pt x="0" y="0"/>
+                </a:moveTo>
+                <a:lnTo>
+                  <a:pt x="2154326" y="0"/>
+                </a:lnTo>
+                <a:lnTo>
+                  <a:pt x="1971446" y="548640"/>
+                </a:lnTo>
+                <a:lnTo>
+                  <a:pt x="0" y="548640"/>
+                </a:lnTo>
+                <a:close/>
+              </a:path>
+            </a:pathLst>
+          </a:custGeom>
+          <a:solidFill>
+            <a:srgbClr val="E5E5E5"/>
+          </a:solidFill>
+          <a:ln w="12700">
+            <a:solidFill>
+              <a:srgbClr val="E5E5E5">
+                <a:alpha val="0"/>
+              </a:srgbClr>
+            </a:solidFill>
+            <a:prstDash val="solid"/>
+          </a:ln>
+        </p:spPr>
+      </p:sp>
+      <p:sp>
+        <p:nvSpPr>
+          <p:cNvPr id="34" name="Text 32"/>
+          <p:cNvSpPr txBox="1"/>
+          <p:nvPr/>
+        </p:nvSpPr>
+        <p:spPr>
+          <a:xfrm>
+            <a:off x="7423099" y="1965960"/>
+            <a:ext cx="1834286" cy="548640"/>
+          </a:xfrm>
+          <a:prstGeom prst="rect">
+            <a:avLst/>
+          </a:prstGeom>
+          <a:noFill/>
+          <a:ln/>
+        </p:spPr>
+        <p:txBody>
+          <a:bodyPr wrap="square" lIns="0" tIns="0" rIns="0" bIns="0" rtlCol="0" anchor="ctr"/>
+          <a:lstStyle/>
+          <a:p>
+            <a:pPr indent="0" marL="0">
+              <a:buNone/>
+            </a:pPr>
+            <a:r>
+              <a:rPr lang="en-US" sz="1300" b="1" dirty="0">
+                <a:solidFill>
+                  <a:srgbClr val="414141"/>
+                </a:solidFill>
+                <a:latin typeface="Poppins SemiBold" pitchFamily="34" charset="0"/>
+                <a:ea typeface="Poppins SemiBold" pitchFamily="34" charset="-122"/>
+                <a:cs typeface="Poppins SemiBold" pitchFamily="34" charset="-120"/>
+              </a:rPr>
+              <a:t>R4  </a:t>
+            </a:r>
+            <a:pPr indent="0" marL="0">
+              <a:buNone/>
+            </a:pPr>
+            <a:r>
+              <a:rPr lang="en-US" sz="1300" dirty="0">
+                <a:solidFill>
+                  <a:srgbClr val="414141"/>
+                </a:solidFill>
+                <a:latin typeface="Poppins SemiBold" pitchFamily="34" charset="0"/>
+                <a:ea typeface="Poppins SemiBold" pitchFamily="34" charset="-122"/>
+                <a:cs typeface="Poppins SemiBold" pitchFamily="34" charset="-120"/>
+              </a:rPr>
+              <a:t>2027.03–04</a:t>
+            </a:r>
+            <a:endParaRPr lang="en-US" sz="1300" dirty="0"/>
+          </a:p>
+        </p:txBody>
+      </p:sp>
+      <p:sp>
+        <p:nvSpPr>
+          <p:cNvPr id="35" name="Shape 33"/>
+          <p:cNvSpPr/>
+          <p:nvPr/>
+        </p:nvSpPr>
+        <p:spPr>
+          <a:xfrm>
+            <a:off x="7285939" y="2697480"/>
+            <a:ext cx="2108606" cy="3246120"/>
+          </a:xfrm>
+          <a:prstGeom prst="rect">
+            <a:avLst/>
+          </a:prstGeom>
+          <a:solidFill>
+            <a:srgbClr val="FFFFFF"/>
+          </a:solidFill>
+          <a:ln w="12700">
+            <a:solidFill>
+              <a:srgbClr val="E5E5E5"/>
+            </a:solidFill>
+            <a:prstDash val="solid"/>
+          </a:ln>
+        </p:spPr>
+      </p:sp>
+      <p:sp>
+        <p:nvSpPr>
+          <p:cNvPr id="36" name="Text 34"/>
+          <p:cNvSpPr txBox="1"/>
+          <p:nvPr/>
+        </p:nvSpPr>
+        <p:spPr>
+          <a:xfrm>
+            <a:off x="7468819" y="2880360"/>
+            <a:ext cx="1742846" cy="457200"/>
+          </a:xfrm>
+          <a:prstGeom prst="rect">
+            <a:avLst/>
+          </a:prstGeom>
+          <a:noFill/>
+          <a:ln/>
+        </p:spPr>
+        <p:txBody>
+          <a:bodyPr wrap="square" lIns="0" tIns="0" rIns="0" bIns="0" rtlCol="0" anchor="ctr"/>
+          <a:lstStyle/>
+          <a:p>
+            <a:pPr indent="0" marL="0">
+              <a:buNone/>
+            </a:pPr>
+            <a:r>
+              <a:rPr lang="en-US" sz="1800" b="1" dirty="0">
+                <a:solidFill>
+                  <a:srgbClr val="414141"/>
+                </a:solidFill>
+                <a:latin typeface="Noto Sans TC" pitchFamily="34" charset="0"/>
+                <a:ea typeface="Noto Sans TC" pitchFamily="34" charset="-122"/>
+                <a:cs typeface="Noto Sans TC" pitchFamily="34" charset="-120"/>
+              </a:rPr>
+              <a:t>授權／IP／加盟</a:t>
+            </a:r>
+            <a:endParaRPr lang="en-US" sz="1800" dirty="0"/>
+          </a:p>
+        </p:txBody>
+      </p:sp>
+      <p:sp>
+        <p:nvSpPr>
+          <p:cNvPr id="37" name="Text 35"/>
+          <p:cNvSpPr txBox="1"/>
+          <p:nvPr/>
+        </p:nvSpPr>
+        <p:spPr>
+          <a:xfrm>
+            <a:off x="7468819" y="3383280"/>
+            <a:ext cx="1742846" cy="868680"/>
+          </a:xfrm>
+          <a:prstGeom prst="rect">
+            <a:avLst/>
+          </a:prstGeom>
+          <a:noFill/>
+          <a:ln/>
+        </p:spPr>
+        <p:txBody>
+          <a:bodyPr wrap="square" lIns="0" tIns="0" rIns="0" bIns="0" rtlCol="0" anchor="t"/>
+          <a:lstStyle/>
+          <a:p>
+            <a:pPr indent="0" marL="0">
+              <a:buNone/>
+            </a:pPr>
+            <a:r>
+              <a:rPr lang="en-US" sz="1300" dirty="0">
+                <a:solidFill>
+                  <a:srgbClr val="414141"/>
+                </a:solidFill>
+                <a:latin typeface="Noto Sans TC" pitchFamily="34" charset="0"/>
+                <a:ea typeface="Noto Sans TC" pitchFamily="34" charset="-122"/>
+                <a:cs typeface="Noto Sans TC" pitchFamily="34" charset="-120"/>
+              </a:rPr>
+              <a:t>授權技術、品牌或展店，收取權利金</a:t>
+            </a:r>
+            <a:endParaRPr lang="en-US" sz="1300" dirty="0"/>
+          </a:p>
+        </p:txBody>
+      </p:sp>
+      <p:sp>
+        <p:nvSpPr>
+          <p:cNvPr id="38" name="Text 36"/>
+          <p:cNvSpPr txBox="1"/>
+          <p:nvPr/>
+        </p:nvSpPr>
+        <p:spPr>
+          <a:xfrm>
+            <a:off x="7468819" y="4343400"/>
+            <a:ext cx="1742846" cy="274320"/>
+          </a:xfrm>
+          <a:prstGeom prst="rect">
+            <a:avLst/>
+          </a:prstGeom>
+          <a:noFill/>
+          <a:ln/>
+        </p:spPr>
+        <p:txBody>
+          <a:bodyPr wrap="square" lIns="0" tIns="0" rIns="0" bIns="0" rtlCol="0" anchor="ctr"/>
+          <a:lstStyle/>
+          <a:p>
+            <a:pPr indent="0" marL="0">
+              <a:buNone/>
+            </a:pPr>
+            <a:r>
+              <a:rPr lang="en-US" sz="1100" dirty="0">
+                <a:solidFill>
+                  <a:srgbClr val="8A8A8A"/>
+                </a:solidFill>
+                <a:latin typeface="Noto Sans TC" pitchFamily="34" charset="0"/>
+                <a:ea typeface="Noto Sans TC" pitchFamily="34" charset="-122"/>
+                <a:cs typeface="Noto Sans TC" pitchFamily="34" charset="-120"/>
+              </a:rPr>
+              <a:t>進行方式</a:t>
+            </a:r>
+            <a:endParaRPr lang="en-US" sz="1100" dirty="0"/>
+          </a:p>
+        </p:txBody>
+      </p:sp>
+      <p:sp>
+        <p:nvSpPr>
+          <p:cNvPr id="39" name="Text 37"/>
+          <p:cNvSpPr txBox="1"/>
+          <p:nvPr/>
+        </p:nvSpPr>
+        <p:spPr>
+          <a:xfrm>
+            <a:off x="7468819" y="4599432"/>
+            <a:ext cx="1742846" cy="320040"/>
+          </a:xfrm>
+          <a:prstGeom prst="rect">
+            <a:avLst/>
+          </a:prstGeom>
+          <a:noFill/>
+          <a:ln/>
+        </p:spPr>
+        <p:txBody>
+          <a:bodyPr wrap="square" lIns="0" tIns="0" rIns="0" bIns="0" rtlCol="0" anchor="ctr"/>
+          <a:lstStyle/>
+          <a:p>
+            <a:pPr indent="0" marL="0">
+              <a:buNone/>
+            </a:pPr>
+            <a:r>
+              <a:rPr lang="en-US" sz="1300" b="1" dirty="0">
+                <a:solidFill>
+                  <a:srgbClr val="414141"/>
+                </a:solidFill>
+                <a:latin typeface="Noto Sans TC" pitchFamily="34" charset="0"/>
+                <a:ea typeface="Noto Sans TC" pitchFamily="34" charset="-122"/>
+                <a:cs typeface="Noto Sans TC" pitchFamily="34" charset="-120"/>
+              </a:rPr>
+              <a:t>個人</a:t>
+            </a:r>
+            <a:endParaRPr lang="en-US" sz="1300" dirty="0"/>
+          </a:p>
+        </p:txBody>
+      </p:sp>
+      <p:sp>
+        <p:nvSpPr>
+          <p:cNvPr id="40" name="Text 38"/>
+          <p:cNvSpPr txBox="1"/>
+          <p:nvPr/>
+        </p:nvSpPr>
+        <p:spPr>
+          <a:xfrm>
+            <a:off x="7468819" y="4983480"/>
+            <a:ext cx="1742846" cy="274320"/>
+          </a:xfrm>
+          <a:prstGeom prst="rect">
+            <a:avLst/>
+          </a:prstGeom>
+          <a:noFill/>
+          <a:ln/>
+        </p:spPr>
+        <p:txBody>
+          <a:bodyPr wrap="square" lIns="0" tIns="0" rIns="0" bIns="0" rtlCol="0" anchor="ctr"/>
+          <a:lstStyle/>
+          <a:p>
+            <a:pPr indent="0" marL="0">
+              <a:buNone/>
+            </a:pPr>
+            <a:r>
+              <a:rPr lang="en-US" sz="1100" dirty="0">
+                <a:solidFill>
+                  <a:srgbClr val="8A8A8A"/>
+                </a:solidFill>
+                <a:latin typeface="Noto Sans TC" pitchFamily="34" charset="0"/>
+                <a:ea typeface="Noto Sans TC" pitchFamily="34" charset="-122"/>
+                <a:cs typeface="Noto Sans TC" pitchFamily="34" charset="-120"/>
+              </a:rPr>
+              <a:t>個案舉例</a:t>
+            </a:r>
+            <a:endParaRPr lang="en-US" sz="1100" dirty="0"/>
+          </a:p>
+        </p:txBody>
+      </p:sp>
+      <p:sp>
+        <p:nvSpPr>
+          <p:cNvPr id="41" name="Text 39"/>
+          <p:cNvSpPr txBox="1"/>
+          <p:nvPr/>
+        </p:nvSpPr>
+        <p:spPr>
+          <a:xfrm>
+            <a:off x="7468819" y="5212080"/>
+            <a:ext cx="1742846" cy="685800"/>
+          </a:xfrm>
+          <a:prstGeom prst="rect">
+            <a:avLst/>
+          </a:prstGeom>
+          <a:noFill/>
+          <a:ln/>
+        </p:spPr>
+        <p:txBody>
+          <a:bodyPr wrap="square" lIns="0" tIns="0" rIns="0" bIns="0" rtlCol="0" anchor="t"/>
+          <a:lstStyle/>
+          <a:p>
+            <a:pPr indent="0" marL="0">
+              <a:lnSpc>
+                <a:spcPct val="95000"/>
+              </a:lnSpc>
+              <a:buNone/>
+            </a:pPr>
+            <a:r>
+              <a:rPr lang="en-US" sz="1200" dirty="0">
+                <a:solidFill>
+                  <a:srgbClr val="414141"/>
+                </a:solidFill>
+                <a:latin typeface="Noto Sans TC" pitchFamily="34" charset="0"/>
+                <a:ea typeface="Noto Sans TC" pitchFamily="34" charset="-122"/>
+                <a:cs typeface="Noto Sans TC" pitchFamily="34" charset="-120"/>
+              </a:rPr>
+              <a:t>意藍資訊</a:t>
+            </a:r>
+            <a:endParaRPr lang="en-US" sz="1200" dirty="0"/>
+          </a:p>
+          <a:p>
+            <a:pPr indent="0" marL="0">
+              <a:lnSpc>
+                <a:spcPct val="95000"/>
+              </a:lnSpc>
+              <a:buNone/>
+            </a:pPr>
+            <a:r>
+              <a:rPr lang="en-US" sz="1200" dirty="0">
+                <a:solidFill>
+                  <a:srgbClr val="414141"/>
+                </a:solidFill>
+                <a:latin typeface="Noto Sans TC" pitchFamily="34" charset="0"/>
+                <a:ea typeface="Noto Sans TC" pitchFamily="34" charset="-122"/>
+                <a:cs typeface="Noto Sans TC" pitchFamily="34" charset="-120"/>
+              </a:rPr>
+              <a:t>印花樂</a:t>
+            </a:r>
+            <a:endParaRPr lang="en-US" sz="1200" dirty="0"/>
+          </a:p>
+          <a:p>
+            <a:pPr indent="0" marL="0">
+              <a:lnSpc>
+                <a:spcPct val="95000"/>
+              </a:lnSpc>
+              <a:buNone/>
+            </a:pPr>
+            <a:r>
+              <a:rPr lang="en-US" sz="1200" dirty="0">
+                <a:solidFill>
+                  <a:srgbClr val="414141"/>
+                </a:solidFill>
+                <a:latin typeface="Noto Sans TC" pitchFamily="34" charset="0"/>
+                <a:ea typeface="Noto Sans TC" pitchFamily="34" charset="-122"/>
+                <a:cs typeface="Noto Sans TC" pitchFamily="34" charset="-120"/>
+              </a:rPr>
+              <a:t>台灣吧</a:t>
+            </a:r>
+            <a:endParaRPr lang="en-US" sz="1200" dirty="0"/>
+          </a:p>
+        </p:txBody>
+      </p:sp>
+      <p:sp>
+        <p:nvSpPr>
+          <p:cNvPr id="42" name="Shape 40"/>
+          <p:cNvSpPr/>
+          <p:nvPr/>
+        </p:nvSpPr>
+        <p:spPr>
+          <a:xfrm>
+            <a:off x="9531706" y="1965960"/>
+            <a:ext cx="2154326" cy="548640"/>
+          </a:xfrm>
+          <a:custGeom>
+            <a:avLst/>
+            <a:gdLst/>
+            <a:ahLst/>
+            <a:cxnLst/>
+            <a:rect l="l" t="t" r="r" b="b"/>
+            <a:pathLst>
+              <a:path w="2154326" h="548640">
+                <a:moveTo>
+                  <a:pt x="0" y="0"/>
+                </a:moveTo>
+                <a:lnTo>
+                  <a:pt x="2154326" y="0"/>
+                </a:lnTo>
+                <a:lnTo>
+                  <a:pt x="1971446" y="548640"/>
+                </a:lnTo>
+                <a:lnTo>
+                  <a:pt x="0" y="548640"/>
+                </a:lnTo>
+                <a:close/>
+              </a:path>
+            </a:pathLst>
+          </a:custGeom>
+          <a:solidFill>
+            <a:srgbClr val="E5E5E5"/>
+          </a:solidFill>
+          <a:ln w="12700">
+            <a:solidFill>
+              <a:srgbClr val="E5E5E5">
+                <a:alpha val="0"/>
+              </a:srgbClr>
+            </a:solidFill>
+            <a:prstDash val="solid"/>
+          </a:ln>
+        </p:spPr>
+      </p:sp>
+      <p:sp>
+        <p:nvSpPr>
+          <p:cNvPr id="43" name="Text 41"/>
+          <p:cNvSpPr txBox="1"/>
+          <p:nvPr/>
+        </p:nvSpPr>
+        <p:spPr>
+          <a:xfrm>
+            <a:off x="9668866" y="1965960"/>
+            <a:ext cx="1834286" cy="548640"/>
+          </a:xfrm>
+          <a:prstGeom prst="rect">
+            <a:avLst/>
+          </a:prstGeom>
+          <a:noFill/>
+          <a:ln/>
+        </p:spPr>
+        <p:txBody>
+          <a:bodyPr wrap="square" lIns="0" tIns="0" rIns="0" bIns="0" rtlCol="0" anchor="ctr"/>
+          <a:lstStyle/>
+          <a:p>
+            <a:pPr indent="0" marL="0">
+              <a:buNone/>
+            </a:pPr>
+            <a:r>
+              <a:rPr lang="en-US" sz="1300" b="1" dirty="0">
+                <a:solidFill>
+                  <a:srgbClr val="414141"/>
+                </a:solidFill>
+                <a:latin typeface="Poppins SemiBold" pitchFamily="34" charset="0"/>
+                <a:ea typeface="Poppins SemiBold" pitchFamily="34" charset="-122"/>
+                <a:cs typeface="Poppins SemiBold" pitchFamily="34" charset="-120"/>
+              </a:rPr>
+              <a:t>R5  </a:t>
+            </a:r>
+            <a:pPr indent="0" marL="0">
+              <a:buNone/>
+            </a:pPr>
+            <a:r>
+              <a:rPr lang="en-US" sz="1300" dirty="0">
+                <a:solidFill>
+                  <a:srgbClr val="414141"/>
+                </a:solidFill>
+                <a:latin typeface="Poppins SemiBold" pitchFamily="34" charset="0"/>
+                <a:ea typeface="Poppins SemiBold" pitchFamily="34" charset="-122"/>
+                <a:cs typeface="Poppins SemiBold" pitchFamily="34" charset="-120"/>
+              </a:rPr>
+              <a:t>2027.05–06</a:t>
+            </a:r>
+            <a:endParaRPr lang="en-US" sz="1300" dirty="0"/>
+          </a:p>
+        </p:txBody>
+      </p:sp>
+      <p:sp>
+        <p:nvSpPr>
+          <p:cNvPr id="44" name="Shape 42"/>
+          <p:cNvSpPr/>
+          <p:nvPr/>
+        </p:nvSpPr>
+        <p:spPr>
+          <a:xfrm>
+            <a:off x="9531706" y="2697480"/>
+            <a:ext cx="2108606" cy="3246120"/>
+          </a:xfrm>
+          <a:prstGeom prst="rect">
+            <a:avLst/>
+          </a:prstGeom>
+          <a:solidFill>
+            <a:srgbClr val="FFFFFF"/>
+          </a:solidFill>
+          <a:ln w="12700">
+            <a:solidFill>
+              <a:srgbClr val="E5E5E5"/>
+            </a:solidFill>
+            <a:prstDash val="solid"/>
+          </a:ln>
+        </p:spPr>
+      </p:sp>
+      <p:sp>
+        <p:nvSpPr>
+          <p:cNvPr id="45" name="Text 43"/>
+          <p:cNvSpPr txBox="1"/>
+          <p:nvPr/>
+        </p:nvSpPr>
+        <p:spPr>
+          <a:xfrm>
+            <a:off x="9714586" y="2880360"/>
+            <a:ext cx="1742846" cy="457200"/>
+          </a:xfrm>
+          <a:prstGeom prst="rect">
+            <a:avLst/>
+          </a:prstGeom>
+          <a:noFill/>
+          <a:ln/>
+        </p:spPr>
+        <p:txBody>
+          <a:bodyPr wrap="square" lIns="0" tIns="0" rIns="0" bIns="0" rtlCol="0" anchor="ctr"/>
+          <a:lstStyle/>
+          <a:p>
+            <a:pPr indent="0" marL="0">
+              <a:buNone/>
+            </a:pPr>
+            <a:r>
+              <a:rPr lang="en-US" sz="1800" b="1" dirty="0">
+                <a:solidFill>
+                  <a:srgbClr val="414141"/>
+                </a:solidFill>
+                <a:latin typeface="Noto Sans TC" pitchFamily="34" charset="0"/>
+                <a:ea typeface="Noto Sans TC" pitchFamily="34" charset="-122"/>
+                <a:cs typeface="Noto Sans TC" pitchFamily="34" charset="-120"/>
+              </a:rPr>
+              <a:t>專案／服務</a:t>
+            </a:r>
+            <a:endParaRPr lang="en-US" sz="1800" dirty="0"/>
+          </a:p>
+        </p:txBody>
+      </p:sp>
+      <p:sp>
+        <p:nvSpPr>
+          <p:cNvPr id="46" name="Text 44"/>
+          <p:cNvSpPr txBox="1"/>
+          <p:nvPr/>
+        </p:nvSpPr>
+        <p:spPr>
+          <a:xfrm>
+            <a:off x="9714586" y="3383280"/>
+            <a:ext cx="1742846" cy="868680"/>
+          </a:xfrm>
+          <a:prstGeom prst="rect">
+            <a:avLst/>
+          </a:prstGeom>
+          <a:noFill/>
+          <a:ln/>
+        </p:spPr>
+        <p:txBody>
+          <a:bodyPr wrap="square" lIns="0" tIns="0" rIns="0" bIns="0" rtlCol="0" anchor="t"/>
+          <a:lstStyle/>
+          <a:p>
+            <a:pPr indent="0" marL="0">
+              <a:buNone/>
+            </a:pPr>
+            <a:r>
+              <a:rPr lang="en-US" sz="1300" dirty="0">
+                <a:solidFill>
+                  <a:srgbClr val="414141"/>
+                </a:solidFill>
+                <a:latin typeface="Noto Sans TC" pitchFamily="34" charset="0"/>
+                <a:ea typeface="Noto Sans TC" pitchFamily="34" charset="-122"/>
+                <a:cs typeface="Noto Sans TC" pitchFamily="34" charset="-120"/>
+              </a:rPr>
+              <a:t>依專案或服務內容計價；另提一項優化建議</a:t>
+            </a:r>
+            <a:endParaRPr lang="en-US" sz="1300" dirty="0"/>
+          </a:p>
+        </p:txBody>
+      </p:sp>
+      <p:sp>
+        <p:nvSpPr>
+          <p:cNvPr id="47" name="Text 45"/>
+          <p:cNvSpPr txBox="1"/>
+          <p:nvPr/>
+        </p:nvSpPr>
+        <p:spPr>
+          <a:xfrm>
+            <a:off x="9714586" y="4343400"/>
+            <a:ext cx="1742846" cy="274320"/>
+          </a:xfrm>
+          <a:prstGeom prst="rect">
+            <a:avLst/>
+          </a:prstGeom>
+          <a:noFill/>
+          <a:ln/>
+        </p:spPr>
+        <p:txBody>
+          <a:bodyPr wrap="square" lIns="0" tIns="0" rIns="0" bIns="0" rtlCol="0" anchor="ctr"/>
+          <a:lstStyle/>
+          <a:p>
+            <a:pPr indent="0" marL="0">
+              <a:buNone/>
+            </a:pPr>
+            <a:r>
+              <a:rPr lang="en-US" sz="1100" dirty="0">
+                <a:solidFill>
+                  <a:srgbClr val="8A8A8A"/>
+                </a:solidFill>
+                <a:latin typeface="Noto Sans TC" pitchFamily="34" charset="0"/>
+                <a:ea typeface="Noto Sans TC" pitchFamily="34" charset="-122"/>
+                <a:cs typeface="Noto Sans TC" pitchFamily="34" charset="-120"/>
+              </a:rPr>
+              <a:t>進行方式</a:t>
+            </a:r>
+            <a:endParaRPr lang="en-US" sz="1100" dirty="0"/>
+          </a:p>
+        </p:txBody>
+      </p:sp>
+      <p:sp>
+        <p:nvSpPr>
+          <p:cNvPr id="48" name="Text 46"/>
+          <p:cNvSpPr txBox="1"/>
+          <p:nvPr/>
+        </p:nvSpPr>
+        <p:spPr>
+          <a:xfrm>
+            <a:off x="9714586" y="4599432"/>
+            <a:ext cx="1742846" cy="320040"/>
+          </a:xfrm>
+          <a:prstGeom prst="rect">
+            <a:avLst/>
+          </a:prstGeom>
+          <a:noFill/>
+          <a:ln/>
+        </p:spPr>
+        <p:txBody>
+          <a:bodyPr wrap="square" lIns="0" tIns="0" rIns="0" bIns="0" rtlCol="0" anchor="ctr"/>
+          <a:lstStyle/>
+          <a:p>
+            <a:pPr indent="0" marL="0">
+              <a:buNone/>
+            </a:pPr>
+            <a:r>
+              <a:rPr lang="en-US" sz="1300" b="1" dirty="0">
+                <a:solidFill>
+                  <a:srgbClr val="414141"/>
+                </a:solidFill>
+                <a:latin typeface="Noto Sans TC" pitchFamily="34" charset="0"/>
+                <a:ea typeface="Noto Sans TC" pitchFamily="34" charset="-122"/>
+                <a:cs typeface="Noto Sans TC" pitchFamily="34" charset="-120"/>
+              </a:rPr>
+              <a:t>個人＋收穫分享</a:t>
+            </a:r>
+            <a:endParaRPr lang="en-US" sz="1300" dirty="0"/>
+          </a:p>
+        </p:txBody>
+      </p:sp>
+      <p:sp>
+        <p:nvSpPr>
+          <p:cNvPr id="49" name="Text 47"/>
+          <p:cNvSpPr txBox="1"/>
+          <p:nvPr/>
+        </p:nvSpPr>
+        <p:spPr>
+          <a:xfrm>
+            <a:off x="9714586" y="4983480"/>
+            <a:ext cx="1742846" cy="274320"/>
+          </a:xfrm>
+          <a:prstGeom prst="rect">
+            <a:avLst/>
+          </a:prstGeom>
+          <a:noFill/>
+          <a:ln/>
+        </p:spPr>
+        <p:txBody>
+          <a:bodyPr wrap="square" lIns="0" tIns="0" rIns="0" bIns="0" rtlCol="0" anchor="ctr"/>
+          <a:lstStyle/>
+          <a:p>
+            <a:pPr indent="0" marL="0">
+              <a:buNone/>
+            </a:pPr>
+            <a:r>
+              <a:rPr lang="en-US" sz="1100" dirty="0">
+                <a:solidFill>
+                  <a:srgbClr val="8A8A8A"/>
+                </a:solidFill>
+                <a:latin typeface="Noto Sans TC" pitchFamily="34" charset="0"/>
+                <a:ea typeface="Noto Sans TC" pitchFamily="34" charset="-122"/>
+                <a:cs typeface="Noto Sans TC" pitchFamily="34" charset="-120"/>
+              </a:rPr>
+              <a:t>個案舉例</a:t>
+            </a:r>
+            <a:endParaRPr lang="en-US" sz="1100" dirty="0"/>
+          </a:p>
+        </p:txBody>
+      </p:sp>
+      <p:sp>
+        <p:nvSpPr>
+          <p:cNvPr id="50" name="Text 48"/>
+          <p:cNvSpPr txBox="1"/>
+          <p:nvPr/>
+        </p:nvSpPr>
+        <p:spPr>
+          <a:xfrm>
+            <a:off x="9714586" y="5212080"/>
+            <a:ext cx="1742846" cy="685800"/>
+          </a:xfrm>
+          <a:prstGeom prst="rect">
+            <a:avLst/>
+          </a:prstGeom>
+          <a:noFill/>
+          <a:ln/>
+        </p:spPr>
+        <p:txBody>
+          <a:bodyPr wrap="square" lIns="0" tIns="0" rIns="0" bIns="0" rtlCol="0" anchor="t"/>
+          <a:lstStyle/>
+          <a:p>
+            <a:pPr indent="0" marL="0">
+              <a:lnSpc>
+                <a:spcPct val="95000"/>
+              </a:lnSpc>
+              <a:buNone/>
+            </a:pPr>
+            <a:r>
+              <a:rPr lang="en-US" sz="1200" dirty="0">
+                <a:solidFill>
+                  <a:srgbClr val="414141"/>
+                </a:solidFill>
+                <a:latin typeface="Noto Sans TC" pitchFamily="34" charset="0"/>
+                <a:ea typeface="Noto Sans TC" pitchFamily="34" charset="-122"/>
+                <a:cs typeface="Noto Sans TC" pitchFamily="34" charset="-120"/>
+              </a:rPr>
+              <a:t>Tagtoo</a:t>
+            </a:r>
+            <a:endParaRPr lang="en-US" sz="1200" dirty="0"/>
+          </a:p>
+          <a:p>
+            <a:pPr indent="0" marL="0">
+              <a:lnSpc>
+                <a:spcPct val="95000"/>
+              </a:lnSpc>
+              <a:buNone/>
+            </a:pPr>
+            <a:r>
+              <a:rPr lang="en-US" sz="1200" dirty="0">
+                <a:solidFill>
+                  <a:srgbClr val="414141"/>
+                </a:solidFill>
+                <a:latin typeface="Noto Sans TC" pitchFamily="34" charset="0"/>
+                <a:ea typeface="Noto Sans TC" pitchFamily="34" charset="-122"/>
+                <a:cs typeface="Noto Sans TC" pitchFamily="34" charset="-120"/>
+              </a:rPr>
+              <a:t>紅門互動</a:t>
+            </a:r>
+            <a:endParaRPr lang="en-US" sz="1200" dirty="0"/>
+          </a:p>
+          <a:p>
+            <a:pPr indent="0" marL="0">
+              <a:lnSpc>
+                <a:spcPct val="95000"/>
+              </a:lnSpc>
+              <a:buNone/>
+            </a:pPr>
+            <a:r>
+              <a:rPr lang="en-US" sz="1200" dirty="0">
+                <a:solidFill>
+                  <a:srgbClr val="414141"/>
+                </a:solidFill>
+                <a:latin typeface="Noto Sans TC" pitchFamily="34" charset="0"/>
+                <a:ea typeface="Noto Sans TC" pitchFamily="34" charset="-122"/>
+                <a:cs typeface="Noto Sans TC" pitchFamily="34" charset="-120"/>
+              </a:rPr>
+              <a:t>多扶假期</a:t>
+            </a:r>
+            <a:endParaRPr lang="en-US" sz="1200" dirty="0"/>
+          </a:p>
+        </p:txBody>
+      </p:sp>
+      <p:sp>
+        <p:nvSpPr>
+          <p:cNvPr id="25" name="Slide Number Placeholder 0"/>
+          <p:cNvSpPr>
+            <a:spLocks noGrp="1"/>
+          </p:cNvSpPr>
+          <p:nvPr>
+            <p:ph type="sldNum" sz="quarter" idx="4294967295"/>
+          </p:nvPr>
+        </p:nvSpPr>
+        <p:spPr>
+          <a:xfrm>
+            <a:off x="11155680" y="6355080"/>
+            <a:ext cx="457200" cy="274320"/>
+          </a:xfrm>
+          <a:prstGeom prst="rect">
+            <a:avLst/>
+          </a:prstGeom>
+          <a:extLst>
+            <a:ext uri="{C572A759-6A51-4108-AA02-DFA0A04FC94B}">
+              <ma14:wrappingTextBoxFlag xmlns:ma14="http://schemas.microsoft.com/office/mac/drawingml/2011/main" val="0"/>
+            </a:ext>
+          </a:extLst>
+        </p:spPr>
+        <p:txBody>
+          <a:bodyPr/>
+          <a:lstStyle>
+            <a:lvl1pPr>
+              <a:defRPr sz="1000">
+                <a:solidFill>
+                  <a:srgbClr val="8A8A8A"/>
+                </a:solidFill>
+                <a:latin typeface="Poppins SemiBold"/>
+                <a:ea typeface="Poppins SemiBold"/>
+                <a:cs typeface="Poppins SemiBold"/>
+              </a:defRPr>
+            </a:lvl1pPr>
+          </a:lstStyle>
+          <a:p>
+            <a:pPr algn="r"/>
+            <a:fld id="{F7021451-1387-4CA6-816F-3879F97B5CBC}" type="slidenum">
+              <a:rPr b="0" lang="en-US"/>
+              <a:t>2</a:t>
+            </a:fld>
+            <a:endParaRPr lang="en-US"/>
+          </a:p>
+        </p:txBody>
+      </p:sp>
+    </p:spTree>
+  </p:cSld>
+  <p:clrMapOvr>
+    <a:masterClrMapping/>
+  </p:clrMapOvr>
+</p:sld>
+</file>
+
+<file path=ppt/slides/slide3.xml><?xml version="1.0" encoding="utf-8"?>
+<p:sld xmlns:a="http://schemas.openxmlformats.org/drawingml/2006/main" xmlns:r="http://schemas.openxmlformats.org/officeDocument/2006/relationships" xmlns:p="http://schemas.openxmlformats.org/presentationml/2006/main">
+  <p:cSld name="Slide 3">
     <p:spTree>
       <p:nvGrpSpPr>
         <p:cNvPr id="1" name=""/>
@@ -3810,7 +6755,7 @@
             <a:pPr algn="r"/>
             <a:fld id="{F7021451-1387-4CA6-816F-3879F97B5CBC}" type="slidenum">
               <a:rPr b="0" lang="en-US"/>
-              <a:t>2</a:t>
+              <a:t>3</a:t>
             </a:fld>
             <a:endParaRPr lang="en-US"/>
           </a:p>
@@ -3824,9 +6769,9 @@
 </p:sld>
 </file>
 
-<file path=ppt/slides/slide3.xml><?xml version="1.0" encoding="utf-8"?>
+<file path=ppt/slides/slide4.xml><?xml version="1.0" encoding="utf-8"?>
 <p:sld xmlns:a="http://schemas.openxmlformats.org/drawingml/2006/main" xmlns:r="http://schemas.openxmlformats.org/officeDocument/2006/relationships" xmlns:p="http://schemas.openxmlformats.org/presentationml/2006/main">
-  <p:cSld name="Slide 3">
+  <p:cSld name="Slide 4">
     <p:spTree>
       <p:nvGrpSpPr>
         <p:cNvPr id="1" name=""/>
@@ -5042,7 +7987,7 @@
             <a:pPr algn="r"/>
             <a:fld id="{F7021451-1387-4CA6-816F-3879F97B5CBC}" type="slidenum">
               <a:rPr b="0" lang="en-US"/>
-              <a:t>3</a:t>
+              <a:t>4</a:t>
             </a:fld>
             <a:endParaRPr lang="en-US"/>
           </a:p>
@@ -5056,9 +8001,9 @@
 </p:sld>
 </file>
 
-<file path=ppt/slides/slide4.xml><?xml version="1.0" encoding="utf-8"?>
+<file path=ppt/slides/slide5.xml><?xml version="1.0" encoding="utf-8"?>
 <p:sld xmlns:a="http://schemas.openxmlformats.org/drawingml/2006/main" xmlns:r="http://schemas.openxmlformats.org/officeDocument/2006/relationships" xmlns:p="http://schemas.openxmlformats.org/presentationml/2006/main">
-  <p:cSld name="Slide 4">
+  <p:cSld name="Slide 5">
     <p:spTree>
       <p:nvGrpSpPr>
         <p:cNvPr id="1" name=""/>
@@ -6454,7 +9399,7 @@
             <a:pPr algn="r"/>
             <a:fld id="{F7021451-1387-4CA6-816F-3879F97B5CBC}" type="slidenum">
               <a:rPr b="0" lang="en-US"/>
-              <a:t>4</a:t>
+              <a:t>5</a:t>
             </a:fld>
             <a:endParaRPr lang="en-US"/>
           </a:p>
@@ -6468,9 +9413,9 @@
 </p:sld>
 </file>
 
-<file path=ppt/slides/slide5.xml><?xml version="1.0" encoding="utf-8"?>
+<file path=ppt/slides/slide6.xml><?xml version="1.0" encoding="utf-8"?>
 <p:sld xmlns:a="http://schemas.openxmlformats.org/drawingml/2006/main" xmlns:r="http://schemas.openxmlformats.org/officeDocument/2006/relationships" xmlns:p="http://schemas.openxmlformats.org/presentationml/2006/main">
-  <p:cSld name="Slide 5">
+  <p:cSld name="Slide 6">
     <p:spTree>
       <p:nvGrpSpPr>
         <p:cNvPr id="1" name=""/>
@@ -7037,9 +9982,9 @@
 </p:sld>
 </file>
 
-<file path=ppt/slides/slide6.xml><?xml version="1.0" encoding="utf-8"?>
+<file path=ppt/slides/slide7.xml><?xml version="1.0" encoding="utf-8"?>
 <p:sld xmlns:a="http://schemas.openxmlformats.org/drawingml/2006/main" xmlns:r="http://schemas.openxmlformats.org/officeDocument/2006/relationships" xmlns:p="http://schemas.openxmlformats.org/presentationml/2006/main">
-  <p:cSld name="Slide 6">
+  <p:cSld name="Slide 7">
     <p:spTree>
       <p:nvGrpSpPr>
         <p:cNvPr id="1" name=""/>
@@ -7709,9 +10654,9 @@
 </p:sld>
 </file>
 
-<file path=ppt/slides/slide7.xml><?xml version="1.0" encoding="utf-8"?>
+<file path=ppt/slides/slide8.xml><?xml version="1.0" encoding="utf-8"?>
 <p:sld xmlns:a="http://schemas.openxmlformats.org/drawingml/2006/main" xmlns:r="http://schemas.openxmlformats.org/officeDocument/2006/relationships" xmlns:p="http://schemas.openxmlformats.org/presentationml/2006/main">
-  <p:cSld name="Slide 7">
+  <p:cSld name="Slide 8">
     <p:spTree>
       <p:nvGrpSpPr>
         <p:cNvPr id="1" name=""/>
@@ -8480,7 +11425,7 @@
             <a:pPr algn="r"/>
             <a:fld id="{F7021451-1387-4CA6-816F-3879F97B5CBC}" type="slidenum">
               <a:rPr b="0" lang="en-US"/>
-              <a:t>7</a:t>
+              <a:t>8</a:t>
             </a:fld>
             <a:endParaRPr lang="en-US"/>
           </a:p>
@@ -8494,9 +11439,9 @@
 </p:sld>
 </file>
 
-<file path=ppt/slides/slide8.xml><?xml version="1.0" encoding="utf-8"?>
+<file path=ppt/slides/slide9.xml><?xml version="1.0" encoding="utf-8"?>
 <p:sld xmlns:a="http://schemas.openxmlformats.org/drawingml/2006/main" xmlns:r="http://schemas.openxmlformats.org/officeDocument/2006/relationships" xmlns:p="http://schemas.openxmlformats.org/presentationml/2006/main">
-  <p:cSld name="Slide 8">
+  <p:cSld name="Slide 9">
     <p:spTree>
       <p:nvGrpSpPr>
         <p:cNvPr id="1" name=""/>
@@ -9188,610 +12133,9 @@
             <a:pPr algn="r"/>
             <a:fld id="{F7021451-1387-4CA6-816F-3879F97B5CBC}" type="slidenum">
               <a:rPr b="0" lang="en-US"/>
-              <a:t>8</a:t>
+              <a:t>9</a:t>
             </a:fld>
             <a:endParaRPr lang="en-US"/>
-          </a:p>
-        </p:txBody>
-      </p:sp>
-    </p:spTree>
-  </p:cSld>
-  <p:clrMapOvr>
-    <a:masterClrMapping/>
-  </p:clrMapOvr>
-</p:sld>
-</file>
-
-<file path=ppt/slides/slide9.xml><?xml version="1.0" encoding="utf-8"?>
-<p:sld xmlns:a="http://schemas.openxmlformats.org/drawingml/2006/main" xmlns:r="http://schemas.openxmlformats.org/officeDocument/2006/relationships" xmlns:p="http://schemas.openxmlformats.org/presentationml/2006/main">
-  <p:cSld name="Slide 9">
-    <p:spTree>
-      <p:nvGrpSpPr>
-        <p:cNvPr id="1" name=""/>
-        <p:cNvGrpSpPr/>
-        <p:nvPr/>
-      </p:nvGrpSpPr>
-      <p:grpSpPr>
-        <a:xfrm>
-          <a:off x="0" y="0"/>
-          <a:ext cx="0" cy="0"/>
-          <a:chOff x="0" y="0"/>
-          <a:chExt cx="0" cy="0"/>
-        </a:xfrm>
-      </p:grpSpPr>
-      <p:sp>
-        <p:nvSpPr>
-          <p:cNvPr id="2" name="Shape 0"/>
-          <p:cNvSpPr/>
-          <p:nvPr/>
-        </p:nvSpPr>
-        <p:spPr>
-          <a:xfrm>
-            <a:off x="9692640" y="2377440"/>
-            <a:ext cx="2194560" cy="2194560"/>
-          </a:xfrm>
-          <a:prstGeom prst="ellipse">
-            <a:avLst/>
-          </a:prstGeom>
-          <a:ln w="19050">
-            <a:solidFill>
-              <a:srgbClr val="FFFFFF">
-                <a:alpha val="18000"/>
-              </a:srgbClr>
-            </a:solidFill>
-            <a:prstDash val="solid"/>
-          </a:ln>
-        </p:spPr>
-      </p:sp>
-      <p:sp>
-        <p:nvSpPr>
-          <p:cNvPr id="3" name="Shape 1"/>
-          <p:cNvSpPr/>
-          <p:nvPr/>
-        </p:nvSpPr>
-        <p:spPr>
-          <a:xfrm>
-            <a:off x="9189720" y="1874520"/>
-            <a:ext cx="3200400" cy="3200400"/>
-          </a:xfrm>
-          <a:prstGeom prst="ellipse">
-            <a:avLst/>
-          </a:prstGeom>
-          <a:ln w="19050">
-            <a:solidFill>
-              <a:srgbClr val="FFFFFF">
-                <a:alpha val="18000"/>
-              </a:srgbClr>
-            </a:solidFill>
-            <a:prstDash val="solid"/>
-          </a:ln>
-        </p:spPr>
-      </p:sp>
-      <p:sp>
-        <p:nvSpPr>
-          <p:cNvPr id="4" name="Shape 2"/>
-          <p:cNvSpPr/>
-          <p:nvPr/>
-        </p:nvSpPr>
-        <p:spPr>
-          <a:xfrm>
-            <a:off x="8686800" y="1371600"/>
-            <a:ext cx="4206240" cy="4206240"/>
-          </a:xfrm>
-          <a:prstGeom prst="ellipse">
-            <a:avLst/>
-          </a:prstGeom>
-          <a:ln w="19050">
-            <a:solidFill>
-              <a:srgbClr val="FFFFFF">
-                <a:alpha val="18000"/>
-              </a:srgbClr>
-            </a:solidFill>
-            <a:prstDash val="solid"/>
-          </a:ln>
-        </p:spPr>
-      </p:sp>
-      <p:sp>
-        <p:nvSpPr>
-          <p:cNvPr id="5" name="Shape 3"/>
-          <p:cNvSpPr/>
-          <p:nvPr/>
-        </p:nvSpPr>
-        <p:spPr>
-          <a:xfrm>
-            <a:off x="8183880" y="868680"/>
-            <a:ext cx="5212080" cy="5212080"/>
-          </a:xfrm>
-          <a:prstGeom prst="ellipse">
-            <a:avLst/>
-          </a:prstGeom>
-          <a:ln w="19050">
-            <a:solidFill>
-              <a:srgbClr val="FFFFFF">
-                <a:alpha val="18000"/>
-              </a:srgbClr>
-            </a:solidFill>
-            <a:prstDash val="solid"/>
-          </a:ln>
-        </p:spPr>
-      </p:sp>
-      <p:sp>
-        <p:nvSpPr>
-          <p:cNvPr id="6" name="Shape 4"/>
-          <p:cNvSpPr/>
-          <p:nvPr/>
-        </p:nvSpPr>
-        <p:spPr>
-          <a:xfrm>
-            <a:off x="7680960" y="365760"/>
-            <a:ext cx="6217920" cy="6217920"/>
-          </a:xfrm>
-          <a:prstGeom prst="ellipse">
-            <a:avLst/>
-          </a:prstGeom>
-          <a:ln w="19050">
-            <a:solidFill>
-              <a:srgbClr val="FFFFFF">
-                <a:alpha val="18000"/>
-              </a:srgbClr>
-            </a:solidFill>
-            <a:prstDash val="solid"/>
-          </a:ln>
-        </p:spPr>
-      </p:sp>
-      <p:sp>
-        <p:nvSpPr>
-          <p:cNvPr id="7" name="Text 5"/>
-          <p:cNvSpPr txBox="1"/>
-          <p:nvPr/>
-        </p:nvSpPr>
-        <p:spPr>
-          <a:xfrm>
-            <a:off x="548640" y="1371600"/>
-            <a:ext cx="7315200" cy="822960"/>
-          </a:xfrm>
-          <a:prstGeom prst="rect">
-            <a:avLst/>
-          </a:prstGeom>
-          <a:noFill/>
-          <a:ln/>
-        </p:spPr>
-        <p:txBody>
-          <a:bodyPr wrap="square" lIns="0" tIns="0" rIns="0" bIns="0" rtlCol="0" anchor="ctr"/>
-          <a:lstStyle/>
-          <a:p>
-            <a:pPr indent="0" marL="0">
-              <a:buNone/>
-            </a:pPr>
-            <a:r>
-              <a:rPr lang="en-US" sz="4000" b="1" dirty="0">
-                <a:solidFill>
-                  <a:srgbClr val="FFFFFF"/>
-                </a:solidFill>
-                <a:latin typeface="Noto Sans TC" pitchFamily="34" charset="0"/>
-                <a:ea typeface="Noto Sans TC" pitchFamily="34" charset="-122"/>
-                <a:cs typeface="Noto Sans TC" pitchFamily="34" charset="-120"/>
-              </a:rPr>
-              <a:t>接下來</a:t>
-            </a:r>
-            <a:endParaRPr lang="en-US" sz="4000" dirty="0"/>
-          </a:p>
-        </p:txBody>
-      </p:sp>
-      <p:sp>
-        <p:nvSpPr>
-          <p:cNvPr id="8" name="Shape 6"/>
-          <p:cNvSpPr/>
-          <p:nvPr/>
-        </p:nvSpPr>
-        <p:spPr>
-          <a:xfrm>
-            <a:off x="548640" y="2560320"/>
-            <a:ext cx="2194560" cy="685800"/>
-          </a:xfrm>
-          <a:custGeom>
-            <a:avLst/>
-            <a:gdLst/>
-            <a:ahLst/>
-            <a:cxnLst/>
-            <a:rect l="l" t="t" r="r" b="b"/>
-            <a:pathLst>
-              <a:path w="2194560" h="685800">
-                <a:moveTo>
-                  <a:pt x="0" y="0"/>
-                </a:moveTo>
-                <a:lnTo>
-                  <a:pt x="2194560" y="0"/>
-                </a:lnTo>
-                <a:lnTo>
-                  <a:pt x="1965960" y="685800"/>
-                </a:lnTo>
-                <a:lnTo>
-                  <a:pt x="0" y="685800"/>
-                </a:lnTo>
-                <a:close/>
-              </a:path>
-            </a:pathLst>
-          </a:custGeom>
-          <a:solidFill>
-            <a:srgbClr val="FFFFFF"/>
-          </a:solidFill>
-          <a:ln w="12700">
-            <a:solidFill>
-              <a:srgbClr val="FFFFFF">
-                <a:alpha val="0"/>
-              </a:srgbClr>
-            </a:solidFill>
-            <a:prstDash val="solid"/>
-          </a:ln>
-        </p:spPr>
-      </p:sp>
-      <p:sp>
-        <p:nvSpPr>
-          <p:cNvPr id="9" name="Text 7"/>
-          <p:cNvSpPr txBox="1"/>
-          <p:nvPr/>
-        </p:nvSpPr>
-        <p:spPr>
-          <a:xfrm>
-            <a:off x="731520" y="2560320"/>
-            <a:ext cx="1828800" cy="685800"/>
-          </a:xfrm>
-          <a:prstGeom prst="rect">
-            <a:avLst/>
-          </a:prstGeom>
-          <a:noFill/>
-          <a:ln/>
-        </p:spPr>
-        <p:txBody>
-          <a:bodyPr wrap="square" lIns="0" tIns="0" rIns="0" bIns="0" rtlCol="0" anchor="ctr"/>
-          <a:lstStyle/>
-          <a:p>
-            <a:pPr indent="0" marL="0">
-              <a:buNone/>
-            </a:pPr>
-            <a:r>
-              <a:rPr lang="en-US" sz="1800" b="1" dirty="0">
-                <a:solidFill>
-                  <a:srgbClr val="0E7EE2"/>
-                </a:solidFill>
-                <a:latin typeface="Noto Sans TC" pitchFamily="34" charset="0"/>
-                <a:ea typeface="Noto Sans TC" pitchFamily="34" charset="-122"/>
-                <a:cs typeface="Noto Sans TC" pitchFamily="34" charset="-120"/>
-              </a:rPr>
-              <a:t>3 天內</a:t>
-            </a:r>
-            <a:endParaRPr lang="en-US" sz="1800" dirty="0"/>
-          </a:p>
-        </p:txBody>
-      </p:sp>
-      <p:sp>
-        <p:nvSpPr>
-          <p:cNvPr id="10" name="Text 8"/>
-          <p:cNvSpPr txBox="1"/>
-          <p:nvPr/>
-        </p:nvSpPr>
-        <p:spPr>
-          <a:xfrm>
-            <a:off x="3017520" y="2560320"/>
-            <a:ext cx="7772400" cy="685800"/>
-          </a:xfrm>
-          <a:prstGeom prst="rect">
-            <a:avLst/>
-          </a:prstGeom>
-          <a:noFill/>
-          <a:ln/>
-        </p:spPr>
-        <p:txBody>
-          <a:bodyPr wrap="square" lIns="0" tIns="0" rIns="0" bIns="0" rtlCol="0" anchor="ctr"/>
-          <a:lstStyle/>
-          <a:p>
-            <a:pPr indent="0" marL="0">
-              <a:buNone/>
-            </a:pPr>
-            <a:r>
-              <a:rPr lang="en-US" sz="1900" dirty="0">
-                <a:solidFill>
-                  <a:srgbClr val="FFFFFF"/>
-                </a:solidFill>
-                <a:latin typeface="Noto Sans TC" pitchFamily="34" charset="0"/>
-                <a:ea typeface="Noto Sans TC" pitchFamily="34" charset="-122"/>
-                <a:cs typeface="Noto Sans TC" pitchFamily="34" charset="-120"/>
-              </a:rPr>
-              <a:t>專案經理彙整回饋，安排大家勾選的協助</a:t>
-            </a:r>
-            <a:endParaRPr lang="en-US" sz="1900" dirty="0"/>
-          </a:p>
-        </p:txBody>
-      </p:sp>
-      <p:sp>
-        <p:nvSpPr>
-          <p:cNvPr id="11" name="Shape 9"/>
-          <p:cNvSpPr/>
-          <p:nvPr/>
-        </p:nvSpPr>
-        <p:spPr>
-          <a:xfrm>
-            <a:off x="548640" y="3520440"/>
-            <a:ext cx="2194560" cy="685800"/>
-          </a:xfrm>
-          <a:custGeom>
-            <a:avLst/>
-            <a:gdLst/>
-            <a:ahLst/>
-            <a:cxnLst/>
-            <a:rect l="l" t="t" r="r" b="b"/>
-            <a:pathLst>
-              <a:path w="2194560" h="685800">
-                <a:moveTo>
-                  <a:pt x="0" y="0"/>
-                </a:moveTo>
-                <a:lnTo>
-                  <a:pt x="2194560" y="0"/>
-                </a:lnTo>
-                <a:lnTo>
-                  <a:pt x="1965960" y="685800"/>
-                </a:lnTo>
-                <a:lnTo>
-                  <a:pt x="0" y="685800"/>
-                </a:lnTo>
-                <a:close/>
-              </a:path>
-            </a:pathLst>
-          </a:custGeom>
-          <a:solidFill>
-            <a:srgbClr val="FFFFFF"/>
-          </a:solidFill>
-          <a:ln w="12700">
-            <a:solidFill>
-              <a:srgbClr val="FFFFFF">
-                <a:alpha val="0"/>
-              </a:srgbClr>
-            </a:solidFill>
-            <a:prstDash val="solid"/>
-          </a:ln>
-        </p:spPr>
-      </p:sp>
-      <p:sp>
-        <p:nvSpPr>
-          <p:cNvPr id="12" name="Text 10"/>
-          <p:cNvSpPr txBox="1"/>
-          <p:nvPr/>
-        </p:nvSpPr>
-        <p:spPr>
-          <a:xfrm>
-            <a:off x="731520" y="3520440"/>
-            <a:ext cx="1828800" cy="685800"/>
-          </a:xfrm>
-          <a:prstGeom prst="rect">
-            <a:avLst/>
-          </a:prstGeom>
-          <a:noFill/>
-          <a:ln/>
-        </p:spPr>
-        <p:txBody>
-          <a:bodyPr wrap="square" lIns="0" tIns="0" rIns="0" bIns="0" rtlCol="0" anchor="ctr"/>
-          <a:lstStyle/>
-          <a:p>
-            <a:pPr indent="0" marL="0">
-              <a:buNone/>
-            </a:pPr>
-            <a:r>
-              <a:rPr lang="en-US" sz="1800" b="1" dirty="0">
-                <a:solidFill>
-                  <a:srgbClr val="0E7EE2"/>
-                </a:solidFill>
-                <a:latin typeface="Noto Sans TC" pitchFamily="34" charset="0"/>
-                <a:ea typeface="Noto Sans TC" pitchFamily="34" charset="-122"/>
-                <a:cs typeface="Noto Sans TC" pitchFamily="34" charset="-120"/>
-              </a:rPr>
-              <a:t>W8</a:t>
-            </a:r>
-            <a:endParaRPr lang="en-US" sz="1800" dirty="0"/>
-          </a:p>
-        </p:txBody>
-      </p:sp>
-      <p:sp>
-        <p:nvSpPr>
-          <p:cNvPr id="13" name="Text 11"/>
-          <p:cNvSpPr txBox="1"/>
-          <p:nvPr/>
-        </p:nvSpPr>
-        <p:spPr>
-          <a:xfrm>
-            <a:off x="3017520" y="3520440"/>
-            <a:ext cx="7772400" cy="685800"/>
-          </a:xfrm>
-          <a:prstGeom prst="rect">
-            <a:avLst/>
-          </a:prstGeom>
-          <a:noFill/>
-          <a:ln/>
-        </p:spPr>
-        <p:txBody>
-          <a:bodyPr wrap="square" lIns="0" tIns="0" rIns="0" bIns="0" rtlCol="0" anchor="ctr"/>
-          <a:lstStyle/>
-          <a:p>
-            <a:pPr indent="0" marL="0">
-              <a:buNone/>
-            </a:pPr>
-            <a:r>
-              <a:rPr lang="en-US" sz="1900" dirty="0">
-                <a:solidFill>
-                  <a:srgbClr val="FFFFFF"/>
-                </a:solidFill>
-                <a:latin typeface="Noto Sans TC" pitchFamily="34" charset="0"/>
-                <a:ea typeface="Noto Sans TC" pitchFamily="34" charset="-122"/>
-                <a:cs typeface="Noto Sans TC" pitchFamily="34" charset="-120"/>
-              </a:rPr>
-              <a:t>依回饋修訂、成果歸檔，繳交一頁學習反思</a:t>
-            </a:r>
-            <a:endParaRPr lang="en-US" sz="1900" dirty="0"/>
-          </a:p>
-        </p:txBody>
-      </p:sp>
-      <p:sp>
-        <p:nvSpPr>
-          <p:cNvPr id="14" name="Shape 12"/>
-          <p:cNvSpPr/>
-          <p:nvPr/>
-        </p:nvSpPr>
-        <p:spPr>
-          <a:xfrm>
-            <a:off x="548640" y="4480560"/>
-            <a:ext cx="2194560" cy="685800"/>
-          </a:xfrm>
-          <a:custGeom>
-            <a:avLst/>
-            <a:gdLst/>
-            <a:ahLst/>
-            <a:cxnLst/>
-            <a:rect l="l" t="t" r="r" b="b"/>
-            <a:pathLst>
-              <a:path w="2194560" h="685800">
-                <a:moveTo>
-                  <a:pt x="0" y="0"/>
-                </a:moveTo>
-                <a:lnTo>
-                  <a:pt x="2194560" y="0"/>
-                </a:lnTo>
-                <a:lnTo>
-                  <a:pt x="1965960" y="685800"/>
-                </a:lnTo>
-                <a:lnTo>
-                  <a:pt x="0" y="685800"/>
-                </a:lnTo>
-                <a:close/>
-              </a:path>
-            </a:pathLst>
-          </a:custGeom>
-          <a:solidFill>
-            <a:srgbClr val="FF9E3E"/>
-          </a:solidFill>
-          <a:ln w="12700">
-            <a:solidFill>
-              <a:srgbClr val="FF9E3E">
-                <a:alpha val="0"/>
-              </a:srgbClr>
-            </a:solidFill>
-            <a:prstDash val="solid"/>
-          </a:ln>
-        </p:spPr>
-      </p:sp>
-      <p:sp>
-        <p:nvSpPr>
-          <p:cNvPr id="15" name="Text 13"/>
-          <p:cNvSpPr txBox="1"/>
-          <p:nvPr/>
-        </p:nvSpPr>
-        <p:spPr>
-          <a:xfrm>
-            <a:off x="731520" y="4480560"/>
-            <a:ext cx="1828800" cy="685800"/>
-          </a:xfrm>
-          <a:prstGeom prst="rect">
-            <a:avLst/>
-          </a:prstGeom>
-          <a:noFill/>
-          <a:ln/>
-        </p:spPr>
-        <p:txBody>
-          <a:bodyPr wrap="square" lIns="0" tIns="0" rIns="0" bIns="0" rtlCol="0" anchor="ctr"/>
-          <a:lstStyle/>
-          <a:p>
-            <a:pPr indent="0" marL="0">
-              <a:buNone/>
-            </a:pPr>
-            <a:r>
-              <a:rPr lang="en-US" sz="1800" b="1" dirty="0">
-                <a:solidFill>
-                  <a:srgbClr val="FFFFFF"/>
-                </a:solidFill>
-                <a:latin typeface="Noto Sans TC" pitchFamily="34" charset="0"/>
-                <a:ea typeface="Noto Sans TC" pitchFamily="34" charset="-122"/>
-                <a:cs typeface="Noto Sans TC" pitchFamily="34" charset="-120"/>
-              </a:rPr>
-              <a:t>11–12 月</a:t>
-            </a:r>
-            <a:endParaRPr lang="en-US" sz="1800" dirty="0"/>
-          </a:p>
-        </p:txBody>
-      </p:sp>
-      <p:sp>
-        <p:nvSpPr>
-          <p:cNvPr id="16" name="Text 14"/>
-          <p:cNvSpPr txBox="1"/>
-          <p:nvPr/>
-        </p:nvSpPr>
-        <p:spPr>
-          <a:xfrm>
-            <a:off x="3017520" y="4480560"/>
-            <a:ext cx="7772400" cy="685800"/>
-          </a:xfrm>
-          <a:prstGeom prst="rect">
-            <a:avLst/>
-          </a:prstGeom>
-          <a:noFill/>
-          <a:ln/>
-        </p:spPr>
-        <p:txBody>
-          <a:bodyPr wrap="square" lIns="0" tIns="0" rIns="0" bIns="0" rtlCol="0" anchor="ctr"/>
-          <a:lstStyle/>
-          <a:p>
-            <a:pPr indent="0" marL="0">
-              <a:buNone/>
-            </a:pPr>
-            <a:r>
-              <a:rPr lang="en-US" sz="1900" dirty="0">
-                <a:solidFill>
-                  <a:srgbClr val="FFFFFF"/>
-                </a:solidFill>
-                <a:latin typeface="Noto Sans TC" pitchFamily="34" charset="0"/>
-                <a:ea typeface="Noto Sans TC" pitchFamily="34" charset="-122"/>
-                <a:cs typeface="Noto Sans TC" pitchFamily="34" charset="-120"/>
-              </a:rPr>
-              <a:t>第 2 輪｜交易抽成／媒合（個人進行）</a:t>
-            </a:r>
-            <a:endParaRPr lang="en-US" sz="1900" dirty="0"/>
-          </a:p>
-        </p:txBody>
-      </p:sp>
-      <p:sp>
-        <p:nvSpPr>
-          <p:cNvPr id="17" name="Text 15"/>
-          <p:cNvSpPr txBox="1"/>
-          <p:nvPr/>
-        </p:nvSpPr>
-        <p:spPr>
-          <a:xfrm>
-            <a:off x="548640" y="5669280"/>
-            <a:ext cx="5486400" cy="548640"/>
-          </a:xfrm>
-          <a:prstGeom prst="rect">
-            <a:avLst/>
-          </a:prstGeom>
-          <a:noFill/>
-          <a:ln/>
-        </p:spPr>
-        <p:txBody>
-          <a:bodyPr wrap="square" lIns="0" tIns="0" rIns="0" bIns="0" rtlCol="0" anchor="ctr"/>
-          <a:lstStyle/>
-          <a:p>
-            <a:pPr indent="0" marL="0">
-              <a:buNone/>
-            </a:pPr>
-            <a:r>
-              <a:rPr lang="en-US" sz="2400" b="1" dirty="0">
-                <a:solidFill>
-                  <a:srgbClr val="FFFFFF"/>
-                </a:solidFill>
-                <a:latin typeface="Noto Sans TC" pitchFamily="34" charset="0"/>
-                <a:ea typeface="Noto Sans TC" pitchFamily="34" charset="-122"/>
-                <a:cs typeface="Noto Sans TC" pitchFamily="34" charset="-120"/>
-              </a:rPr>
-              <a:t>謝謝大家！</a:t>
-            </a:r>
-            <a:endParaRPr lang="en-US" sz="2400" dirty="0"/>
           </a:p>
         </p:txBody>
       </p:sp>

--- a/實習生商業模式演練/AAMA_實習生商業模式演練_R1訂閱制.pptx
+++ b/實習生商業模式演練/AAMA_實習生商業模式演練_R1訂閱制.pptx
@@ -8526,7 +8526,7 @@
                 <a:ea typeface="Noto Sans TC" pitchFamily="34" charset="-122"/>
                 <a:cs typeface="Noto Sans TC" pitchFamily="34" charset="-120"/>
               </a:rPr>
-              <a:t>00:45 填寫表 B</a:t>
+              <a:t>00:45 填寫回饋表</a:t>
             </a:r>
             <a:endParaRPr lang="en-US" sz="1600" dirty="0"/>
           </a:p>
@@ -8565,7 +8565,7 @@
                 <a:ea typeface="Noto Sans TC" pitchFamily="34" charset="-122"/>
                 <a:cs typeface="Noto Sans TC" pitchFamily="34" charset="-120"/>
               </a:rPr>
-              <a:t>打 1 分或 5 分，請寫一個具體事例</a:t>
+              <a:t>每位實習生各選最強、最需加強一項，附觀察與建議</a:t>
             </a:r>
             <a:endParaRPr lang="en-US" sz="1300" dirty="0"/>
           </a:p>
@@ -9175,7 +9175,7 @@
                 <a:ea typeface="Noto Sans TC" pitchFamily="34" charset="-122"/>
                 <a:cs typeface="Noto Sans TC" pitchFamily="34" charset="-120"/>
               </a:rPr>
-              <a:t>00:45 填寫表 A</a:t>
+              <a:t>00:45 填寫自評與同儕觀察</a:t>
             </a:r>
             <a:endParaRPr lang="en-US" sz="1600" dirty="0"/>
           </a:p>
@@ -9214,7 +9214,7 @@
                 <a:ea typeface="Noto Sans TC" pitchFamily="34" charset="-122"/>
                 <a:cs typeface="Noto Sans TC" pitchFamily="34" charset="-120"/>
               </a:rPr>
-              <a:t>自評分數、本輪盲點、需要幫忙的地方</a:t>
+              <a:t>自評、需要幫忙的地方，以及夥伴值得學習的一點</a:t>
             </a:r>
             <a:endParaRPr lang="en-US" sz="1300" dirty="0"/>
           </a:p>
@@ -10852,7 +10852,7 @@
                 <a:ea typeface="Noto Sans TC" pitchFamily="34" charset="-122"/>
                 <a:cs typeface="Noto Sans TC" pitchFamily="34" charset="-120"/>
               </a:rPr>
-              <a:t>實習生自評</a:t>
+              <a:t>實習生</a:t>
             </a:r>
             <a:endParaRPr lang="en-US" sz="2000" dirty="0"/>
           </a:p>
@@ -10916,7 +10916,7 @@
                 <a:ea typeface="Noto Sans TC" pitchFamily="34" charset="-122"/>
                 <a:cs typeface="Noto Sans TC" pitchFamily="34" charset="-120"/>
               </a:rPr>
-              <a:t>我負責的部分</a:t>
+              <a:t>自己最強、最弱的一項</a:t>
             </a:r>
             <a:endParaRPr lang="en-US" sz="1500" dirty="0"/>
           </a:p>
@@ -10937,7 +10937,7 @@
                 <a:ea typeface="Noto Sans TC" pitchFamily="34" charset="-122"/>
                 <a:cs typeface="Noto Sans TC" pitchFamily="34" charset="-120"/>
               </a:rPr>
-              <a:t>本輪盲點</a:t>
+              <a:t>本輪盲點、需要幫忙的地方</a:t>
             </a:r>
             <a:endParaRPr lang="en-US" sz="1500" dirty="0"/>
           </a:p>
@@ -10958,7 +10958,7 @@
                 <a:ea typeface="Noto Sans TC" pitchFamily="34" charset="-122"/>
                 <a:cs typeface="Noto Sans TC" pitchFamily="34" charset="-120"/>
               </a:rPr>
-              <a:t>需要幫忙的地方</a:t>
+              <a:t>同儕觀察：夥伴值得學習的一點</a:t>
             </a:r>
             <a:endParaRPr lang="en-US" sz="1500" dirty="0"/>
           </a:p>
@@ -11168,7 +11168,7 @@
                 <a:ea typeface="Noto Sans TC" pitchFamily="34" charset="-122"/>
                 <a:cs typeface="Noto Sans TC" pitchFamily="34" charset="-120"/>
               </a:rPr>
-              <a:t>正職回饋</a:t>
+              <a:t>正職</a:t>
             </a:r>
             <a:endParaRPr lang="en-US" sz="2000" dirty="0"/>
           </a:p>
@@ -11211,7 +11211,7 @@
                 <a:ea typeface="Noto Sans TC" pitchFamily="34" charset="-122"/>
                 <a:cs typeface="Noto Sans TC" pitchFamily="34" charset="-120"/>
               </a:rPr>
-              <a:t>A、B 組各四構面評分 1–5 分</a:t>
+              <a:t>每位實習生一列，不打分數</a:t>
             </a:r>
             <a:endParaRPr lang="en-US" sz="1500" dirty="0"/>
           </a:p>
@@ -11232,7 +11232,7 @@
                 <a:ea typeface="Noto Sans TC" pitchFamily="34" charset="-122"/>
                 <a:cs typeface="Noto Sans TC" pitchFamily="34" charset="-120"/>
               </a:rPr>
-              <a:t>👍 最值得保留的地方</a:t>
+              <a:t>👍 最強的一項＋具體觀察</a:t>
             </a:r>
             <a:endParaRPr lang="en-US" sz="1500" dirty="0"/>
           </a:p>
@@ -11253,7 +11253,7 @@
                 <a:ea typeface="Noto Sans TC" pitchFamily="34" charset="-122"/>
                 <a:cs typeface="Noto Sans TC" pitchFamily="34" charset="-120"/>
               </a:rPr>
-              <a:t>🔧 最該改的地方＋建議做法</a:t>
+              <a:t>🔧 最需加強的一項＋建議做法</a:t>
             </a:r>
             <a:endParaRPr lang="en-US" sz="1500" dirty="0"/>
           </a:p>
@@ -11377,7 +11377,7 @@
                 <a:ea typeface="Noto Sans TC" pitchFamily="34" charset="-122"/>
                 <a:cs typeface="Noto Sans TC" pitchFamily="34" charset="-120"/>
               </a:rPr>
-              <a:t>四構面：九宮格完整度｜資料佐證｜洞察觀點｜表達簡報　　打 1 分或 5 分，請寫一個具體事例</a:t>
+              <a:t>四構面：九宮格完整度｜資料佐證｜洞察觀點｜表達簡報　　請寫具體的行為或內容，避免只寫「很好」</a:t>
             </a:r>
             <a:endParaRPr lang="en-US" sz="1300" dirty="0"/>
           </a:p>
